--- a/docs/pptx/auc3/ritu-auc3-linsubhr-sens-anemia2_10pct.pptx
+++ b/docs/pptx/auc3/ritu-auc3-linsubhr-sens-anemia2_10pct.pptx
@@ -2443,7 +2443,7 @@
           </p:nvSpPr>
           <p:spPr>
             <a:xfrm>
-              <a:off x="1342929" y="2073503"/>
+              <a:off x="1343231" y="2073503"/>
               <a:ext cx="0" cy="3649639"/>
             </a:xfrm>
             <a:custGeom>
@@ -2486,7 +2486,7 @@
           </p:nvSpPr>
           <p:spPr>
             <a:xfrm>
-              <a:off x="2182565" y="2073503"/>
+              <a:off x="2181282" y="2073503"/>
               <a:ext cx="0" cy="3649639"/>
             </a:xfrm>
             <a:custGeom>
@@ -2529,7 +2529,7 @@
           </p:nvSpPr>
           <p:spPr>
             <a:xfrm>
-              <a:off x="3022201" y="2073503"/>
+              <a:off x="3019333" y="2073503"/>
               <a:ext cx="0" cy="3649639"/>
             </a:xfrm>
             <a:custGeom>
@@ -2572,7 +2572,7 @@
           </p:nvSpPr>
           <p:spPr>
             <a:xfrm>
-              <a:off x="3861838" y="2073503"/>
+              <a:off x="3857383" y="2073503"/>
               <a:ext cx="0" cy="3649639"/>
             </a:xfrm>
             <a:custGeom>
@@ -2615,7 +2615,7 @@
           </p:nvSpPr>
           <p:spPr>
             <a:xfrm>
-              <a:off x="4701474" y="2073503"/>
+              <a:off x="4695434" y="2073503"/>
               <a:ext cx="0" cy="3649639"/>
             </a:xfrm>
             <a:custGeom>
@@ -2658,7 +2658,7 @@
           </p:nvSpPr>
           <p:spPr>
             <a:xfrm>
-              <a:off x="5541110" y="2073503"/>
+              <a:off x="5533485" y="2073503"/>
               <a:ext cx="0" cy="3649639"/>
             </a:xfrm>
             <a:custGeom>
@@ -2701,7 +2701,7 @@
           </p:nvSpPr>
           <p:spPr>
             <a:xfrm>
-              <a:off x="6380746" y="2073503"/>
+              <a:off x="6371535" y="2073503"/>
               <a:ext cx="0" cy="3649639"/>
             </a:xfrm>
             <a:custGeom>
@@ -2744,7 +2744,7 @@
           </p:nvSpPr>
           <p:spPr>
             <a:xfrm>
-              <a:off x="7220382" y="2073503"/>
+              <a:off x="7209586" y="2073503"/>
               <a:ext cx="0" cy="3649639"/>
             </a:xfrm>
             <a:custGeom>
@@ -2787,7 +2787,7 @@
           </p:nvSpPr>
           <p:spPr>
             <a:xfrm>
-              <a:off x="8060018" y="2073503"/>
+              <a:off x="8047636" y="2073503"/>
               <a:ext cx="0" cy="3649639"/>
             </a:xfrm>
             <a:custGeom>
@@ -3045,7 +3045,7 @@
           </p:nvSpPr>
           <p:spPr>
             <a:xfrm>
-              <a:off x="923111" y="2073503"/>
+              <a:off x="924206" y="2073503"/>
               <a:ext cx="0" cy="3649639"/>
             </a:xfrm>
             <a:custGeom>
@@ -3088,7 +3088,7 @@
           </p:nvSpPr>
           <p:spPr>
             <a:xfrm>
-              <a:off x="1762747" y="2073503"/>
+              <a:off x="1762257" y="2073503"/>
               <a:ext cx="0" cy="3649639"/>
             </a:xfrm>
             <a:custGeom>
@@ -3131,7 +3131,7 @@
           </p:nvSpPr>
           <p:spPr>
             <a:xfrm>
-              <a:off x="2602383" y="2073503"/>
+              <a:off x="2600307" y="2073503"/>
               <a:ext cx="0" cy="3649639"/>
             </a:xfrm>
             <a:custGeom>
@@ -3174,7 +3174,7 @@
           </p:nvSpPr>
           <p:spPr>
             <a:xfrm>
-              <a:off x="3442019" y="2073503"/>
+              <a:off x="3438358" y="2073503"/>
               <a:ext cx="0" cy="3649639"/>
             </a:xfrm>
             <a:custGeom>
@@ -3217,7 +3217,7 @@
           </p:nvSpPr>
           <p:spPr>
             <a:xfrm>
-              <a:off x="4281656" y="2073503"/>
+              <a:off x="4276409" y="2073503"/>
               <a:ext cx="0" cy="3649639"/>
             </a:xfrm>
             <a:custGeom>
@@ -3260,7 +3260,7 @@
           </p:nvSpPr>
           <p:spPr>
             <a:xfrm>
-              <a:off x="5121292" y="2073503"/>
+              <a:off x="5114459" y="2073503"/>
               <a:ext cx="0" cy="3649639"/>
             </a:xfrm>
             <a:custGeom>
@@ -3303,7 +3303,7 @@
           </p:nvSpPr>
           <p:spPr>
             <a:xfrm>
-              <a:off x="5960928" y="2073503"/>
+              <a:off x="5952510" y="2073503"/>
               <a:ext cx="0" cy="3649639"/>
             </a:xfrm>
             <a:custGeom>
@@ -3346,7 +3346,7 @@
           </p:nvSpPr>
           <p:spPr>
             <a:xfrm>
-              <a:off x="6800564" y="2073503"/>
+              <a:off x="6790560" y="2073503"/>
               <a:ext cx="0" cy="3649639"/>
             </a:xfrm>
             <a:custGeom>
@@ -3389,7 +3389,7 @@
           </p:nvSpPr>
           <p:spPr>
             <a:xfrm>
-              <a:off x="7640200" y="2073503"/>
+              <a:off x="7628611" y="2073503"/>
               <a:ext cx="0" cy="3649639"/>
             </a:xfrm>
             <a:custGeom>
@@ -3432,7 +3432,7 @@
           </p:nvSpPr>
           <p:spPr>
             <a:xfrm>
-              <a:off x="8479836" y="2073503"/>
+              <a:off x="8466662" y="2073503"/>
               <a:ext cx="0" cy="3649639"/>
             </a:xfrm>
             <a:custGeom>
@@ -3475,612 +3475,612 @@
           </p:nvSpPr>
           <p:spPr>
             <a:xfrm>
-              <a:off x="1172049" y="2758069"/>
-              <a:ext cx="7090630" cy="2605364"/>
+              <a:off x="1172049" y="2698546"/>
+              <a:ext cx="7090630" cy="2666228"/>
             </a:xfrm>
             <a:custGeom>
               <a:avLst/>
               <a:pathLst>
-                <a:path w="7090630" h="2605364">
+                <a:path w="7090630" h="2666228">
                   <a:moveTo>
                     <a:pt x="0" y="0"/>
                   </a:moveTo>
                   <a:lnTo>
-                    <a:pt x="71622" y="74488"/>
-                  </a:lnTo>
-                  <a:lnTo>
-                    <a:pt x="143245" y="146995"/>
-                  </a:lnTo>
-                  <a:lnTo>
-                    <a:pt x="214867" y="217572"/>
-                  </a:lnTo>
-                  <a:lnTo>
-                    <a:pt x="286490" y="286271"/>
-                  </a:lnTo>
-                  <a:lnTo>
-                    <a:pt x="358112" y="353142"/>
-                  </a:lnTo>
-                  <a:lnTo>
-                    <a:pt x="429735" y="418234"/>
-                  </a:lnTo>
-                  <a:lnTo>
-                    <a:pt x="501357" y="481593"/>
-                  </a:lnTo>
-                  <a:lnTo>
-                    <a:pt x="572980" y="543266"/>
-                  </a:lnTo>
-                  <a:lnTo>
-                    <a:pt x="644602" y="603298"/>
-                  </a:lnTo>
-                  <a:lnTo>
-                    <a:pt x="716225" y="661733"/>
-                  </a:lnTo>
-                  <a:lnTo>
-                    <a:pt x="787847" y="718612"/>
-                  </a:lnTo>
-                  <a:lnTo>
-                    <a:pt x="859470" y="773978"/>
-                  </a:lnTo>
-                  <a:lnTo>
-                    <a:pt x="931092" y="827871"/>
-                  </a:lnTo>
-                  <a:lnTo>
-                    <a:pt x="1002715" y="880329"/>
-                  </a:lnTo>
-                  <a:lnTo>
-                    <a:pt x="1074337" y="931392"/>
-                  </a:lnTo>
-                  <a:lnTo>
-                    <a:pt x="1145960" y="981095"/>
-                  </a:lnTo>
-                  <a:lnTo>
-                    <a:pt x="1217582" y="1029476"/>
-                  </a:lnTo>
-                  <a:lnTo>
-                    <a:pt x="1289205" y="1076570"/>
-                  </a:lnTo>
-                  <a:lnTo>
-                    <a:pt x="1360827" y="1122410"/>
-                  </a:lnTo>
-                  <a:lnTo>
-                    <a:pt x="1432450" y="1167031"/>
-                  </a:lnTo>
-                  <a:lnTo>
-                    <a:pt x="1504073" y="1210464"/>
-                  </a:lnTo>
-                  <a:lnTo>
-                    <a:pt x="1575695" y="1252741"/>
-                  </a:lnTo>
-                  <a:lnTo>
-                    <a:pt x="1647318" y="1293893"/>
-                  </a:lnTo>
-                  <a:lnTo>
-                    <a:pt x="1718940" y="1333950"/>
-                  </a:lnTo>
-                  <a:lnTo>
-                    <a:pt x="1790563" y="1372942"/>
-                  </a:lnTo>
-                  <a:lnTo>
-                    <a:pt x="1862185" y="1410895"/>
-                  </a:lnTo>
-                  <a:lnTo>
-                    <a:pt x="1933808" y="1447839"/>
-                  </a:lnTo>
-                  <a:lnTo>
-                    <a:pt x="2005430" y="1483799"/>
-                  </a:lnTo>
-                  <a:lnTo>
-                    <a:pt x="2077053" y="1518803"/>
-                  </a:lnTo>
-                  <a:lnTo>
-                    <a:pt x="2148675" y="1552875"/>
-                  </a:lnTo>
-                  <a:lnTo>
-                    <a:pt x="2220298" y="1586040"/>
-                  </a:lnTo>
-                  <a:lnTo>
-                    <a:pt x="2291920" y="1618323"/>
-                  </a:lnTo>
-                  <a:lnTo>
-                    <a:pt x="2363543" y="1649747"/>
-                  </a:lnTo>
-                  <a:lnTo>
-                    <a:pt x="2435165" y="1680334"/>
-                  </a:lnTo>
-                  <a:lnTo>
-                    <a:pt x="2506788" y="1710108"/>
-                  </a:lnTo>
-                  <a:lnTo>
-                    <a:pt x="2578410" y="1739089"/>
-                  </a:lnTo>
-                  <a:lnTo>
-                    <a:pt x="2650033" y="1767299"/>
-                  </a:lnTo>
-                  <a:lnTo>
-                    <a:pt x="2721655" y="1794759"/>
-                  </a:lnTo>
-                  <a:lnTo>
-                    <a:pt x="2793278" y="1821487"/>
-                  </a:lnTo>
-                  <a:lnTo>
-                    <a:pt x="2864901" y="1847505"/>
-                  </a:lnTo>
-                  <a:lnTo>
-                    <a:pt x="2936523" y="1872830"/>
-                  </a:lnTo>
-                  <a:lnTo>
-                    <a:pt x="3008146" y="1897481"/>
-                  </a:lnTo>
-                  <a:lnTo>
-                    <a:pt x="3079768" y="1921476"/>
-                  </a:lnTo>
-                  <a:lnTo>
-                    <a:pt x="3151391" y="1944832"/>
-                  </a:lnTo>
-                  <a:lnTo>
-                    <a:pt x="3223013" y="1967567"/>
-                  </a:lnTo>
-                  <a:lnTo>
-                    <a:pt x="3294636" y="1968867"/>
-                  </a:lnTo>
-                  <a:lnTo>
-                    <a:pt x="3366258" y="1967927"/>
-                  </a:lnTo>
-                  <a:lnTo>
-                    <a:pt x="3437881" y="1966986"/>
-                  </a:lnTo>
-                  <a:lnTo>
-                    <a:pt x="3509503" y="1966043"/>
-                  </a:lnTo>
-                  <a:lnTo>
-                    <a:pt x="3581126" y="1965100"/>
-                  </a:lnTo>
-                  <a:lnTo>
-                    <a:pt x="3652748" y="1964156"/>
-                  </a:lnTo>
-                  <a:lnTo>
-                    <a:pt x="3724371" y="1963210"/>
-                  </a:lnTo>
-                  <a:lnTo>
-                    <a:pt x="3795993" y="1962264"/>
-                  </a:lnTo>
-                  <a:lnTo>
-                    <a:pt x="3867616" y="1961316"/>
-                  </a:lnTo>
-                  <a:lnTo>
-                    <a:pt x="3939238" y="1960367"/>
-                  </a:lnTo>
-                  <a:lnTo>
-                    <a:pt x="4010861" y="1959417"/>
-                  </a:lnTo>
-                  <a:lnTo>
-                    <a:pt x="4082483" y="1958467"/>
-                  </a:lnTo>
-                  <a:lnTo>
-                    <a:pt x="4154106" y="1957515"/>
-                  </a:lnTo>
-                  <a:lnTo>
-                    <a:pt x="4225729" y="1956562"/>
-                  </a:lnTo>
-                  <a:lnTo>
-                    <a:pt x="4297351" y="1955608"/>
-                  </a:lnTo>
-                  <a:lnTo>
-                    <a:pt x="4368974" y="1954653"/>
-                  </a:lnTo>
-                  <a:lnTo>
-                    <a:pt x="4440596" y="1953696"/>
-                  </a:lnTo>
-                  <a:lnTo>
-                    <a:pt x="4512219" y="1952739"/>
-                  </a:lnTo>
-                  <a:lnTo>
-                    <a:pt x="4583841" y="1951781"/>
-                  </a:lnTo>
-                  <a:lnTo>
-                    <a:pt x="4655464" y="1950821"/>
-                  </a:lnTo>
-                  <a:lnTo>
-                    <a:pt x="4727086" y="1949861"/>
-                  </a:lnTo>
-                  <a:lnTo>
-                    <a:pt x="4798709" y="1948899"/>
-                  </a:lnTo>
-                  <a:lnTo>
-                    <a:pt x="4870331" y="1947936"/>
-                  </a:lnTo>
-                  <a:lnTo>
-                    <a:pt x="4941954" y="1946972"/>
-                  </a:lnTo>
-                  <a:lnTo>
-                    <a:pt x="5013576" y="1946007"/>
-                  </a:lnTo>
-                  <a:lnTo>
-                    <a:pt x="5085199" y="1945041"/>
-                  </a:lnTo>
-                  <a:lnTo>
-                    <a:pt x="5156821" y="1944074"/>
-                  </a:lnTo>
-                  <a:lnTo>
-                    <a:pt x="5228444" y="1943106"/>
-                  </a:lnTo>
-                  <a:lnTo>
-                    <a:pt x="5300066" y="1942137"/>
-                  </a:lnTo>
-                  <a:lnTo>
-                    <a:pt x="5371689" y="1941166"/>
-                  </a:lnTo>
-                  <a:lnTo>
-                    <a:pt x="5443311" y="1940195"/>
-                  </a:lnTo>
-                  <a:lnTo>
-                    <a:pt x="5514934" y="1939222"/>
-                  </a:lnTo>
-                  <a:lnTo>
-                    <a:pt x="5586557" y="1938249"/>
-                  </a:lnTo>
-                  <a:lnTo>
-                    <a:pt x="5658179" y="1937274"/>
-                  </a:lnTo>
-                  <a:lnTo>
-                    <a:pt x="5729802" y="1936298"/>
-                  </a:lnTo>
-                  <a:lnTo>
-                    <a:pt x="5801424" y="1935321"/>
-                  </a:lnTo>
-                  <a:lnTo>
-                    <a:pt x="5873047" y="1934343"/>
-                  </a:lnTo>
-                  <a:lnTo>
-                    <a:pt x="5944669" y="1933364"/>
-                  </a:lnTo>
-                  <a:lnTo>
-                    <a:pt x="6016292" y="1932383"/>
-                  </a:lnTo>
-                  <a:lnTo>
-                    <a:pt x="6087914" y="1931402"/>
-                  </a:lnTo>
-                  <a:lnTo>
-                    <a:pt x="6159537" y="1930419"/>
-                  </a:lnTo>
-                  <a:lnTo>
-                    <a:pt x="6231159" y="1929436"/>
-                  </a:lnTo>
-                  <a:lnTo>
-                    <a:pt x="6302782" y="1928451"/>
-                  </a:lnTo>
-                  <a:lnTo>
-                    <a:pt x="6374404" y="1927465"/>
-                  </a:lnTo>
-                  <a:lnTo>
-                    <a:pt x="6446027" y="1926478"/>
-                  </a:lnTo>
-                  <a:lnTo>
-                    <a:pt x="6517649" y="1925490"/>
-                  </a:lnTo>
-                  <a:lnTo>
-                    <a:pt x="6589272" y="1924500"/>
-                  </a:lnTo>
-                  <a:lnTo>
-                    <a:pt x="6660894" y="1923510"/>
-                  </a:lnTo>
-                  <a:lnTo>
-                    <a:pt x="6732517" y="1922519"/>
-                  </a:lnTo>
-                  <a:lnTo>
-                    <a:pt x="6804139" y="1921526"/>
-                  </a:lnTo>
-                  <a:lnTo>
-                    <a:pt x="6875762" y="1920532"/>
-                  </a:lnTo>
-                  <a:lnTo>
-                    <a:pt x="6947385" y="1919537"/>
-                  </a:lnTo>
-                  <a:lnTo>
-                    <a:pt x="7019007" y="1918541"/>
-                  </a:lnTo>
-                  <a:lnTo>
-                    <a:pt x="7090630" y="1917544"/>
-                  </a:lnTo>
-                  <a:lnTo>
-                    <a:pt x="7090630" y="2605364"/>
-                  </a:lnTo>
-                  <a:lnTo>
-                    <a:pt x="7019007" y="2600065"/>
-                  </a:lnTo>
-                  <a:lnTo>
-                    <a:pt x="6947385" y="2594622"/>
-                  </a:lnTo>
-                  <a:lnTo>
-                    <a:pt x="6875762" y="2589029"/>
-                  </a:lnTo>
-                  <a:lnTo>
-                    <a:pt x="6804139" y="2583284"/>
-                  </a:lnTo>
-                  <a:lnTo>
-                    <a:pt x="6732517" y="2577382"/>
-                  </a:lnTo>
-                  <a:lnTo>
-                    <a:pt x="6660894" y="2571318"/>
-                  </a:lnTo>
-                  <a:lnTo>
-                    <a:pt x="6589272" y="2565089"/>
-                  </a:lnTo>
-                  <a:lnTo>
-                    <a:pt x="6517649" y="2558689"/>
-                  </a:lnTo>
-                  <a:lnTo>
-                    <a:pt x="6446027" y="2552115"/>
-                  </a:lnTo>
-                  <a:lnTo>
-                    <a:pt x="6374404" y="2545360"/>
-                  </a:lnTo>
-                  <a:lnTo>
-                    <a:pt x="6302782" y="2538421"/>
-                  </a:lnTo>
-                  <a:lnTo>
-                    <a:pt x="6231159" y="2531293"/>
-                  </a:lnTo>
-                  <a:lnTo>
-                    <a:pt x="6159537" y="2523969"/>
-                  </a:lnTo>
-                  <a:lnTo>
-                    <a:pt x="6087914" y="2516445"/>
-                  </a:lnTo>
-                  <a:lnTo>
-                    <a:pt x="6016292" y="2508716"/>
-                  </a:lnTo>
-                  <a:lnTo>
-                    <a:pt x="5944669" y="2500775"/>
-                  </a:lnTo>
-                  <a:lnTo>
-                    <a:pt x="5873047" y="2492617"/>
-                  </a:lnTo>
-                  <a:lnTo>
-                    <a:pt x="5801424" y="2484236"/>
-                  </a:lnTo>
-                  <a:lnTo>
-                    <a:pt x="5729802" y="2475626"/>
-                  </a:lnTo>
-                  <a:lnTo>
-                    <a:pt x="5658179" y="2466780"/>
-                  </a:lnTo>
-                  <a:lnTo>
-                    <a:pt x="5586557" y="2457693"/>
-                  </a:lnTo>
-                  <a:lnTo>
-                    <a:pt x="5514934" y="2448357"/>
-                  </a:lnTo>
-                  <a:lnTo>
-                    <a:pt x="5443311" y="2438766"/>
-                  </a:lnTo>
-                  <a:lnTo>
-                    <a:pt x="5371689" y="2428913"/>
-                  </a:lnTo>
-                  <a:lnTo>
-                    <a:pt x="5300066" y="2418791"/>
-                  </a:lnTo>
-                  <a:lnTo>
-                    <a:pt x="5228444" y="2408391"/>
-                  </a:lnTo>
-                  <a:lnTo>
-                    <a:pt x="5156821" y="2397708"/>
-                  </a:lnTo>
-                  <a:lnTo>
-                    <a:pt x="5085199" y="2386732"/>
-                  </a:lnTo>
-                  <a:lnTo>
-                    <a:pt x="5013576" y="2375457"/>
-                  </a:lnTo>
-                  <a:lnTo>
-                    <a:pt x="4941954" y="2363873"/>
-                  </a:lnTo>
-                  <a:lnTo>
-                    <a:pt x="4870331" y="2351972"/>
-                  </a:lnTo>
-                  <a:lnTo>
-                    <a:pt x="4798709" y="2339746"/>
-                  </a:lnTo>
-                  <a:lnTo>
-                    <a:pt x="4727086" y="2327186"/>
-                  </a:lnTo>
-                  <a:lnTo>
-                    <a:pt x="4655464" y="2314282"/>
-                  </a:lnTo>
-                  <a:lnTo>
-                    <a:pt x="4583841" y="2301026"/>
-                  </a:lnTo>
-                  <a:lnTo>
-                    <a:pt x="4512219" y="2287407"/>
-                  </a:lnTo>
-                  <a:lnTo>
-                    <a:pt x="4440596" y="2273416"/>
-                  </a:lnTo>
-                  <a:lnTo>
-                    <a:pt x="4368974" y="2259042"/>
-                  </a:lnTo>
-                  <a:lnTo>
-                    <a:pt x="4297351" y="2244276"/>
-                  </a:lnTo>
-                  <a:lnTo>
-                    <a:pt x="4225729" y="2229106"/>
-                  </a:lnTo>
-                  <a:lnTo>
-                    <a:pt x="4154106" y="2213521"/>
-                  </a:lnTo>
-                  <a:lnTo>
-                    <a:pt x="4082483" y="2197510"/>
-                  </a:lnTo>
-                  <a:lnTo>
-                    <a:pt x="4010861" y="2181061"/>
-                  </a:lnTo>
-                  <a:lnTo>
-                    <a:pt x="3939238" y="2164163"/>
-                  </a:lnTo>
-                  <a:lnTo>
-                    <a:pt x="3867616" y="2146802"/>
-                  </a:lnTo>
-                  <a:lnTo>
-                    <a:pt x="3795993" y="2128967"/>
-                  </a:lnTo>
-                  <a:lnTo>
-                    <a:pt x="3724371" y="2110645"/>
-                  </a:lnTo>
-                  <a:lnTo>
-                    <a:pt x="3652748" y="2091821"/>
-                  </a:lnTo>
-                  <a:lnTo>
-                    <a:pt x="3581126" y="2072483"/>
-                  </a:lnTo>
-                  <a:lnTo>
-                    <a:pt x="3509503" y="2052616"/>
-                  </a:lnTo>
-                  <a:lnTo>
-                    <a:pt x="3437881" y="2032206"/>
-                  </a:lnTo>
-                  <a:lnTo>
-                    <a:pt x="3366258" y="2011238"/>
-                  </a:lnTo>
-                  <a:lnTo>
-                    <a:pt x="3294636" y="1989697"/>
-                  </a:lnTo>
-                  <a:lnTo>
-                    <a:pt x="3223013" y="1969806"/>
-                  </a:lnTo>
-                  <a:lnTo>
-                    <a:pt x="3151391" y="1970744"/>
-                  </a:lnTo>
-                  <a:lnTo>
-                    <a:pt x="3079768" y="1971681"/>
-                  </a:lnTo>
-                  <a:lnTo>
-                    <a:pt x="3008146" y="1972617"/>
-                  </a:lnTo>
-                  <a:lnTo>
-                    <a:pt x="2936523" y="1973552"/>
-                  </a:lnTo>
-                  <a:lnTo>
-                    <a:pt x="2864901" y="1974485"/>
-                  </a:lnTo>
-                  <a:lnTo>
-                    <a:pt x="2793278" y="1975418"/>
-                  </a:lnTo>
-                  <a:lnTo>
-                    <a:pt x="2721655" y="1976350"/>
-                  </a:lnTo>
-                  <a:lnTo>
-                    <a:pt x="2650033" y="1977280"/>
-                  </a:lnTo>
-                  <a:lnTo>
-                    <a:pt x="2578410" y="1978210"/>
-                  </a:lnTo>
-                  <a:lnTo>
-                    <a:pt x="2506788" y="1979138"/>
-                  </a:lnTo>
-                  <a:lnTo>
-                    <a:pt x="2435165" y="1980066"/>
-                  </a:lnTo>
-                  <a:lnTo>
-                    <a:pt x="2363543" y="1980992"/>
-                  </a:lnTo>
-                  <a:lnTo>
-                    <a:pt x="2291920" y="1981918"/>
-                  </a:lnTo>
-                  <a:lnTo>
-                    <a:pt x="2220298" y="1982842"/>
-                  </a:lnTo>
-                  <a:lnTo>
-                    <a:pt x="2148675" y="1983765"/>
-                  </a:lnTo>
-                  <a:lnTo>
-                    <a:pt x="2077053" y="1984687"/>
-                  </a:lnTo>
-                  <a:lnTo>
-                    <a:pt x="2005430" y="1985609"/>
-                  </a:lnTo>
-                  <a:lnTo>
-                    <a:pt x="1933808" y="1986529"/>
-                  </a:lnTo>
-                  <a:lnTo>
-                    <a:pt x="1862185" y="1987448"/>
-                  </a:lnTo>
-                  <a:lnTo>
-                    <a:pt x="1790563" y="1988366"/>
-                  </a:lnTo>
-                  <a:lnTo>
-                    <a:pt x="1718940" y="1989283"/>
-                  </a:lnTo>
-                  <a:lnTo>
-                    <a:pt x="1647318" y="1990199"/>
-                  </a:lnTo>
-                  <a:lnTo>
-                    <a:pt x="1575695" y="1991114"/>
-                  </a:lnTo>
-                  <a:lnTo>
-                    <a:pt x="1504073" y="1992028"/>
-                  </a:lnTo>
-                  <a:lnTo>
-                    <a:pt x="1432450" y="1992941"/>
-                  </a:lnTo>
-                  <a:lnTo>
-                    <a:pt x="1360827" y="1993852"/>
-                  </a:lnTo>
-                  <a:lnTo>
-                    <a:pt x="1289205" y="1994763"/>
-                  </a:lnTo>
-                  <a:lnTo>
-                    <a:pt x="1217582" y="1995673"/>
-                  </a:lnTo>
-                  <a:lnTo>
-                    <a:pt x="1145960" y="1996582"/>
-                  </a:lnTo>
-                  <a:lnTo>
-                    <a:pt x="1074337" y="1997490"/>
-                  </a:lnTo>
-                  <a:lnTo>
-                    <a:pt x="1002715" y="1998396"/>
-                  </a:lnTo>
-                  <a:lnTo>
-                    <a:pt x="931092" y="1999302"/>
-                  </a:lnTo>
-                  <a:lnTo>
-                    <a:pt x="859470" y="2000207"/>
-                  </a:lnTo>
-                  <a:lnTo>
-                    <a:pt x="787847" y="2001110"/>
-                  </a:lnTo>
-                  <a:lnTo>
-                    <a:pt x="716225" y="2002013"/>
-                  </a:lnTo>
-                  <a:lnTo>
-                    <a:pt x="644602" y="2002914"/>
-                  </a:lnTo>
-                  <a:lnTo>
-                    <a:pt x="572980" y="2003815"/>
-                  </a:lnTo>
-                  <a:lnTo>
-                    <a:pt x="501357" y="2004714"/>
-                  </a:lnTo>
-                  <a:lnTo>
-                    <a:pt x="429735" y="2005613"/>
-                  </a:lnTo>
-                  <a:lnTo>
-                    <a:pt x="358112" y="2006511"/>
-                  </a:lnTo>
-                  <a:lnTo>
-                    <a:pt x="286490" y="2007407"/>
-                  </a:lnTo>
-                  <a:lnTo>
-                    <a:pt x="214867" y="2008302"/>
-                  </a:lnTo>
-                  <a:lnTo>
-                    <a:pt x="143245" y="2009197"/>
-                  </a:lnTo>
-                  <a:lnTo>
-                    <a:pt x="71622" y="2010090"/>
-                  </a:lnTo>
-                  <a:lnTo>
-                    <a:pt x="0" y="2010983"/>
+                    <a:pt x="71622" y="76859"/>
+                  </a:lnTo>
+                  <a:lnTo>
+                    <a:pt x="143245" y="151652"/>
+                  </a:lnTo>
+                  <a:lnTo>
+                    <a:pt x="214867" y="224433"/>
+                  </a:lnTo>
+                  <a:lnTo>
+                    <a:pt x="286490" y="295258"/>
+                  </a:lnTo>
+                  <a:lnTo>
+                    <a:pt x="358112" y="364179"/>
+                  </a:lnTo>
+                  <a:lnTo>
+                    <a:pt x="429735" y="431247"/>
+                  </a:lnTo>
+                  <a:lnTo>
+                    <a:pt x="501357" y="496512"/>
+                  </a:lnTo>
+                  <a:lnTo>
+                    <a:pt x="572980" y="560022"/>
+                  </a:lnTo>
+                  <a:lnTo>
+                    <a:pt x="644602" y="621824"/>
+                  </a:lnTo>
+                  <a:lnTo>
+                    <a:pt x="716225" y="681965"/>
+                  </a:lnTo>
+                  <a:lnTo>
+                    <a:pt x="787847" y="740489"/>
+                  </a:lnTo>
+                  <a:lnTo>
+                    <a:pt x="859470" y="797439"/>
+                  </a:lnTo>
+                  <a:lnTo>
+                    <a:pt x="931092" y="852859"/>
+                  </a:lnTo>
+                  <a:lnTo>
+                    <a:pt x="1002715" y="906788"/>
+                  </a:lnTo>
+                  <a:lnTo>
+                    <a:pt x="1074337" y="959267"/>
+                  </a:lnTo>
+                  <a:lnTo>
+                    <a:pt x="1145960" y="1010335"/>
+                  </a:lnTo>
+                  <a:lnTo>
+                    <a:pt x="1217582" y="1060031"/>
+                  </a:lnTo>
+                  <a:lnTo>
+                    <a:pt x="1289205" y="1108390"/>
+                  </a:lnTo>
+                  <a:lnTo>
+                    <a:pt x="1360827" y="1155449"/>
+                  </a:lnTo>
+                  <a:lnTo>
+                    <a:pt x="1432450" y="1201243"/>
+                  </a:lnTo>
+                  <a:lnTo>
+                    <a:pt x="1504073" y="1245805"/>
+                  </a:lnTo>
+                  <a:lnTo>
+                    <a:pt x="1575695" y="1289170"/>
+                  </a:lnTo>
+                  <a:lnTo>
+                    <a:pt x="1647318" y="1331368"/>
+                  </a:lnTo>
+                  <a:lnTo>
+                    <a:pt x="1718940" y="1372432"/>
+                  </a:lnTo>
+                  <a:lnTo>
+                    <a:pt x="1790563" y="1412392"/>
+                  </a:lnTo>
+                  <a:lnTo>
+                    <a:pt x="1862185" y="1451278"/>
+                  </a:lnTo>
+                  <a:lnTo>
+                    <a:pt x="1933808" y="1489118"/>
+                  </a:lnTo>
+                  <a:lnTo>
+                    <a:pt x="2005430" y="1525941"/>
+                  </a:lnTo>
+                  <a:lnTo>
+                    <a:pt x="2077053" y="1561773"/>
+                  </a:lnTo>
+                  <a:lnTo>
+                    <a:pt x="2148675" y="1596643"/>
+                  </a:lnTo>
+                  <a:lnTo>
+                    <a:pt x="2220298" y="1630574"/>
+                  </a:lnTo>
+                  <a:lnTo>
+                    <a:pt x="2291920" y="1663594"/>
+                  </a:lnTo>
+                  <a:lnTo>
+                    <a:pt x="2363543" y="1695726"/>
+                  </a:lnTo>
+                  <a:lnTo>
+                    <a:pt x="2435165" y="1726993"/>
+                  </a:lnTo>
+                  <a:lnTo>
+                    <a:pt x="2506788" y="1757421"/>
+                  </a:lnTo>
+                  <a:lnTo>
+                    <a:pt x="2578410" y="1787030"/>
+                  </a:lnTo>
+                  <a:lnTo>
+                    <a:pt x="2650033" y="1815843"/>
+                  </a:lnTo>
+                  <a:lnTo>
+                    <a:pt x="2721655" y="1843881"/>
+                  </a:lnTo>
+                  <a:lnTo>
+                    <a:pt x="2793278" y="1871166"/>
+                  </a:lnTo>
+                  <a:lnTo>
+                    <a:pt x="2864901" y="1897717"/>
+                  </a:lnTo>
+                  <a:lnTo>
+                    <a:pt x="2936523" y="1923554"/>
+                  </a:lnTo>
+                  <a:lnTo>
+                    <a:pt x="3008146" y="1948696"/>
+                  </a:lnTo>
+                  <a:lnTo>
+                    <a:pt x="3079768" y="1973163"/>
+                  </a:lnTo>
+                  <a:lnTo>
+                    <a:pt x="3151391" y="1996972"/>
+                  </a:lnTo>
+                  <a:lnTo>
+                    <a:pt x="3223013" y="2020140"/>
+                  </a:lnTo>
+                  <a:lnTo>
+                    <a:pt x="3294636" y="2028597"/>
+                  </a:lnTo>
+                  <a:lnTo>
+                    <a:pt x="3366258" y="2027525"/>
+                  </a:lnTo>
+                  <a:lnTo>
+                    <a:pt x="3437881" y="2026452"/>
+                  </a:lnTo>
+                  <a:lnTo>
+                    <a:pt x="3509503" y="2025377"/>
+                  </a:lnTo>
+                  <a:lnTo>
+                    <a:pt x="3581126" y="2024300"/>
+                  </a:lnTo>
+                  <a:lnTo>
+                    <a:pt x="3652748" y="2023222"/>
+                  </a:lnTo>
+                  <a:lnTo>
+                    <a:pt x="3724371" y="2022143"/>
+                  </a:lnTo>
+                  <a:lnTo>
+                    <a:pt x="3795993" y="2021063"/>
+                  </a:lnTo>
+                  <a:lnTo>
+                    <a:pt x="3867616" y="2019981"/>
+                  </a:lnTo>
+                  <a:lnTo>
+                    <a:pt x="3939238" y="2018897"/>
+                  </a:lnTo>
+                  <a:lnTo>
+                    <a:pt x="4010861" y="2017813"/>
+                  </a:lnTo>
+                  <a:lnTo>
+                    <a:pt x="4082483" y="2016727"/>
+                  </a:lnTo>
+                  <a:lnTo>
+                    <a:pt x="4154106" y="2015639"/>
+                  </a:lnTo>
+                  <a:lnTo>
+                    <a:pt x="4225729" y="2014550"/>
+                  </a:lnTo>
+                  <a:lnTo>
+                    <a:pt x="4297351" y="2013460"/>
+                  </a:lnTo>
+                  <a:lnTo>
+                    <a:pt x="4368974" y="2012368"/>
+                  </a:lnTo>
+                  <a:lnTo>
+                    <a:pt x="4440596" y="2011275"/>
+                  </a:lnTo>
+                  <a:lnTo>
+                    <a:pt x="4512219" y="2010180"/>
+                  </a:lnTo>
+                  <a:lnTo>
+                    <a:pt x="4583841" y="2009084"/>
+                  </a:lnTo>
+                  <a:lnTo>
+                    <a:pt x="4655464" y="2007987"/>
+                  </a:lnTo>
+                  <a:lnTo>
+                    <a:pt x="4727086" y="2006888"/>
+                  </a:lnTo>
+                  <a:lnTo>
+                    <a:pt x="4798709" y="2005788"/>
+                  </a:lnTo>
+                  <a:lnTo>
+                    <a:pt x="4870331" y="2004686"/>
+                  </a:lnTo>
+                  <a:lnTo>
+                    <a:pt x="4941954" y="2003583"/>
+                  </a:lnTo>
+                  <a:lnTo>
+                    <a:pt x="5013576" y="2002478"/>
+                  </a:lnTo>
+                  <a:lnTo>
+                    <a:pt x="5085199" y="2001372"/>
+                  </a:lnTo>
+                  <a:lnTo>
+                    <a:pt x="5156821" y="2000265"/>
+                  </a:lnTo>
+                  <a:lnTo>
+                    <a:pt x="5228444" y="1999156"/>
+                  </a:lnTo>
+                  <a:lnTo>
+                    <a:pt x="5300066" y="1998046"/>
+                  </a:lnTo>
+                  <a:lnTo>
+                    <a:pt x="5371689" y="1996934"/>
+                  </a:lnTo>
+                  <a:lnTo>
+                    <a:pt x="5443311" y="1995821"/>
+                  </a:lnTo>
+                  <a:lnTo>
+                    <a:pt x="5514934" y="1994706"/>
+                  </a:lnTo>
+                  <a:lnTo>
+                    <a:pt x="5586557" y="1993590"/>
+                  </a:lnTo>
+                  <a:lnTo>
+                    <a:pt x="5658179" y="1992473"/>
+                  </a:lnTo>
+                  <a:lnTo>
+                    <a:pt x="5729802" y="1991354"/>
+                  </a:lnTo>
+                  <a:lnTo>
+                    <a:pt x="5801424" y="1990234"/>
+                  </a:lnTo>
+                  <a:lnTo>
+                    <a:pt x="5873047" y="1989112"/>
+                  </a:lnTo>
+                  <a:lnTo>
+                    <a:pt x="5944669" y="1987989"/>
+                  </a:lnTo>
+                  <a:lnTo>
+                    <a:pt x="6016292" y="1986864"/>
+                  </a:lnTo>
+                  <a:lnTo>
+                    <a:pt x="6087914" y="1985738"/>
+                  </a:lnTo>
+                  <a:lnTo>
+                    <a:pt x="6159537" y="1984610"/>
+                  </a:lnTo>
+                  <a:lnTo>
+                    <a:pt x="6231159" y="1983481"/>
+                  </a:lnTo>
+                  <a:lnTo>
+                    <a:pt x="6302782" y="1982351"/>
+                  </a:lnTo>
+                  <a:lnTo>
+                    <a:pt x="6374404" y="1981219"/>
+                  </a:lnTo>
+                  <a:lnTo>
+                    <a:pt x="6446027" y="1980085"/>
+                  </a:lnTo>
+                  <a:lnTo>
+                    <a:pt x="6517649" y="1978951"/>
+                  </a:lnTo>
+                  <a:lnTo>
+                    <a:pt x="6589272" y="1977814"/>
+                  </a:lnTo>
+                  <a:lnTo>
+                    <a:pt x="6660894" y="1976676"/>
+                  </a:lnTo>
+                  <a:lnTo>
+                    <a:pt x="6732517" y="1975537"/>
+                  </a:lnTo>
+                  <a:lnTo>
+                    <a:pt x="6804139" y="1974396"/>
+                  </a:lnTo>
+                  <a:lnTo>
+                    <a:pt x="6875762" y="1973254"/>
+                  </a:lnTo>
+                  <a:lnTo>
+                    <a:pt x="6947385" y="1972110"/>
+                  </a:lnTo>
+                  <a:lnTo>
+                    <a:pt x="7019007" y="1970965"/>
+                  </a:lnTo>
+                  <a:lnTo>
+                    <a:pt x="7090630" y="1969819"/>
+                  </a:lnTo>
+                  <a:lnTo>
+                    <a:pt x="7090630" y="2666228"/>
+                  </a:lnTo>
+                  <a:lnTo>
+                    <a:pt x="7019007" y="2660910"/>
+                  </a:lnTo>
+                  <a:lnTo>
+                    <a:pt x="6947385" y="2655445"/>
+                  </a:lnTo>
+                  <a:lnTo>
+                    <a:pt x="6875762" y="2649829"/>
+                  </a:lnTo>
+                  <a:lnTo>
+                    <a:pt x="6804139" y="2644058"/>
+                  </a:lnTo>
+                  <a:lnTo>
+                    <a:pt x="6732517" y="2638128"/>
+                  </a:lnTo>
+                  <a:lnTo>
+                    <a:pt x="6660894" y="2632034"/>
+                  </a:lnTo>
+                  <a:lnTo>
+                    <a:pt x="6589272" y="2625771"/>
+                  </a:lnTo>
+                  <a:lnTo>
+                    <a:pt x="6517649" y="2619335"/>
+                  </a:lnTo>
+                  <a:lnTo>
+                    <a:pt x="6446027" y="2612722"/>
+                  </a:lnTo>
+                  <a:lnTo>
+                    <a:pt x="6374404" y="2605926"/>
+                  </a:lnTo>
+                  <a:lnTo>
+                    <a:pt x="6302782" y="2598942"/>
+                  </a:lnTo>
+                  <a:lnTo>
+                    <a:pt x="6231159" y="2591765"/>
+                  </a:lnTo>
+                  <a:lnTo>
+                    <a:pt x="6159537" y="2584389"/>
+                  </a:lnTo>
+                  <a:lnTo>
+                    <a:pt x="6087914" y="2576811"/>
+                  </a:lnTo>
+                  <a:lnTo>
+                    <a:pt x="6016292" y="2569022"/>
+                  </a:lnTo>
+                  <a:lnTo>
+                    <a:pt x="5944669" y="2561019"/>
+                  </a:lnTo>
+                  <a:lnTo>
+                    <a:pt x="5873047" y="2552794"/>
+                  </a:lnTo>
+                  <a:lnTo>
+                    <a:pt x="5801424" y="2544342"/>
+                  </a:lnTo>
+                  <a:lnTo>
+                    <a:pt x="5729802" y="2535657"/>
+                  </a:lnTo>
+                  <a:lnTo>
+                    <a:pt x="5658179" y="2526731"/>
+                  </a:lnTo>
+                  <a:lnTo>
+                    <a:pt x="5586557" y="2517559"/>
+                  </a:lnTo>
+                  <a:lnTo>
+                    <a:pt x="5514934" y="2508134"/>
+                  </a:lnTo>
+                  <a:lnTo>
+                    <a:pt x="5443311" y="2498448"/>
+                  </a:lnTo>
+                  <a:lnTo>
+                    <a:pt x="5371689" y="2488494"/>
+                  </a:lnTo>
+                  <a:lnTo>
+                    <a:pt x="5300066" y="2478266"/>
+                  </a:lnTo>
+                  <a:lnTo>
+                    <a:pt x="5228444" y="2467755"/>
+                  </a:lnTo>
+                  <a:lnTo>
+                    <a:pt x="5156821" y="2456953"/>
+                  </a:lnTo>
+                  <a:lnTo>
+                    <a:pt x="5085199" y="2445853"/>
+                  </a:lnTo>
+                  <a:lnTo>
+                    <a:pt x="5013576" y="2434447"/>
+                  </a:lnTo>
+                  <a:lnTo>
+                    <a:pt x="4941954" y="2422725"/>
+                  </a:lnTo>
+                  <a:lnTo>
+                    <a:pt x="4870331" y="2410680"/>
+                  </a:lnTo>
+                  <a:lnTo>
+                    <a:pt x="4798709" y="2398301"/>
+                  </a:lnTo>
+                  <a:lnTo>
+                    <a:pt x="4727086" y="2385581"/>
+                  </a:lnTo>
+                  <a:lnTo>
+                    <a:pt x="4655464" y="2372509"/>
+                  </a:lnTo>
+                  <a:lnTo>
+                    <a:pt x="4583841" y="2359076"/>
+                  </a:lnTo>
+                  <a:lnTo>
+                    <a:pt x="4512219" y="2345272"/>
+                  </a:lnTo>
+                  <a:lnTo>
+                    <a:pt x="4440596" y="2331086"/>
+                  </a:lnTo>
+                  <a:lnTo>
+                    <a:pt x="4368974" y="2316509"/>
+                  </a:lnTo>
+                  <a:lnTo>
+                    <a:pt x="4297351" y="2301529"/>
+                  </a:lnTo>
+                  <a:lnTo>
+                    <a:pt x="4225729" y="2286135"/>
+                  </a:lnTo>
+                  <a:lnTo>
+                    <a:pt x="4154106" y="2270315"/>
+                  </a:lnTo>
+                  <a:lnTo>
+                    <a:pt x="4082483" y="2254059"/>
+                  </a:lnTo>
+                  <a:lnTo>
+                    <a:pt x="4010861" y="2237353"/>
+                  </a:lnTo>
+                  <a:lnTo>
+                    <a:pt x="3939238" y="2220186"/>
+                  </a:lnTo>
+                  <a:lnTo>
+                    <a:pt x="3867616" y="2202544"/>
+                  </a:lnTo>
+                  <a:lnTo>
+                    <a:pt x="3795993" y="2184415"/>
+                  </a:lnTo>
+                  <a:lnTo>
+                    <a:pt x="3724371" y="2165785"/>
+                  </a:lnTo>
+                  <a:lnTo>
+                    <a:pt x="3652748" y="2146641"/>
+                  </a:lnTo>
+                  <a:lnTo>
+                    <a:pt x="3581126" y="2126967"/>
+                  </a:lnTo>
+                  <a:lnTo>
+                    <a:pt x="3509503" y="2106750"/>
+                  </a:lnTo>
+                  <a:lnTo>
+                    <a:pt x="3437881" y="2085975"/>
+                  </a:lnTo>
+                  <a:lnTo>
+                    <a:pt x="3366258" y="2064625"/>
+                  </a:lnTo>
+                  <a:lnTo>
+                    <a:pt x="3294636" y="2042686"/>
+                  </a:lnTo>
+                  <a:lnTo>
+                    <a:pt x="3223013" y="2029668"/>
+                  </a:lnTo>
+                  <a:lnTo>
+                    <a:pt x="3151391" y="2030738"/>
+                  </a:lnTo>
+                  <a:lnTo>
+                    <a:pt x="3079768" y="2031806"/>
+                  </a:lnTo>
+                  <a:lnTo>
+                    <a:pt x="3008146" y="2032873"/>
+                  </a:lnTo>
+                  <a:lnTo>
+                    <a:pt x="2936523" y="2033938"/>
+                  </a:lnTo>
+                  <a:lnTo>
+                    <a:pt x="2864901" y="2035002"/>
+                  </a:lnTo>
+                  <a:lnTo>
+                    <a:pt x="2793278" y="2036064"/>
+                  </a:lnTo>
+                  <a:lnTo>
+                    <a:pt x="2721655" y="2037126"/>
+                  </a:lnTo>
+                  <a:lnTo>
+                    <a:pt x="2650033" y="2038185"/>
+                  </a:lnTo>
+                  <a:lnTo>
+                    <a:pt x="2578410" y="2039244"/>
+                  </a:lnTo>
+                  <a:lnTo>
+                    <a:pt x="2506788" y="2040301"/>
+                  </a:lnTo>
+                  <a:lnTo>
+                    <a:pt x="2435165" y="2041357"/>
+                  </a:lnTo>
+                  <a:lnTo>
+                    <a:pt x="2363543" y="2042411"/>
+                  </a:lnTo>
+                  <a:lnTo>
+                    <a:pt x="2291920" y="2043464"/>
+                  </a:lnTo>
+                  <a:lnTo>
+                    <a:pt x="2220298" y="2044516"/>
+                  </a:lnTo>
+                  <a:lnTo>
+                    <a:pt x="2148675" y="2045566"/>
+                  </a:lnTo>
+                  <a:lnTo>
+                    <a:pt x="2077053" y="2046615"/>
+                  </a:lnTo>
+                  <a:lnTo>
+                    <a:pt x="2005430" y="2047663"/>
+                  </a:lnTo>
+                  <a:lnTo>
+                    <a:pt x="1933808" y="2048709"/>
+                  </a:lnTo>
+                  <a:lnTo>
+                    <a:pt x="1862185" y="2049754"/>
+                  </a:lnTo>
+                  <a:lnTo>
+                    <a:pt x="1790563" y="2050797"/>
+                  </a:lnTo>
+                  <a:lnTo>
+                    <a:pt x="1718940" y="2051840"/>
+                  </a:lnTo>
+                  <a:lnTo>
+                    <a:pt x="1647318" y="2052880"/>
+                  </a:lnTo>
+                  <a:lnTo>
+                    <a:pt x="1575695" y="2053920"/>
+                  </a:lnTo>
+                  <a:lnTo>
+                    <a:pt x="1504073" y="2054958"/>
+                  </a:lnTo>
+                  <a:lnTo>
+                    <a:pt x="1432450" y="2055995"/>
+                  </a:lnTo>
+                  <a:lnTo>
+                    <a:pt x="1360827" y="2057030"/>
+                  </a:lnTo>
+                  <a:lnTo>
+                    <a:pt x="1289205" y="2058065"/>
+                  </a:lnTo>
+                  <a:lnTo>
+                    <a:pt x="1217582" y="2059097"/>
+                  </a:lnTo>
+                  <a:lnTo>
+                    <a:pt x="1145960" y="2060129"/>
+                  </a:lnTo>
+                  <a:lnTo>
+                    <a:pt x="1074337" y="2061159"/>
+                  </a:lnTo>
+                  <a:lnTo>
+                    <a:pt x="1002715" y="2062188"/>
+                  </a:lnTo>
+                  <a:lnTo>
+                    <a:pt x="931092" y="2063215"/>
+                  </a:lnTo>
+                  <a:lnTo>
+                    <a:pt x="859470" y="2064242"/>
+                  </a:lnTo>
+                  <a:lnTo>
+                    <a:pt x="787847" y="2065266"/>
+                  </a:lnTo>
+                  <a:lnTo>
+                    <a:pt x="716225" y="2066290"/>
+                  </a:lnTo>
+                  <a:lnTo>
+                    <a:pt x="644602" y="2067312"/>
+                  </a:lnTo>
+                  <a:lnTo>
+                    <a:pt x="572980" y="2068333"/>
+                  </a:lnTo>
+                  <a:lnTo>
+                    <a:pt x="501357" y="2069353"/>
+                  </a:lnTo>
+                  <a:lnTo>
+                    <a:pt x="429735" y="2070371"/>
+                  </a:lnTo>
+                  <a:lnTo>
+                    <a:pt x="358112" y="2071388"/>
+                  </a:lnTo>
+                  <a:lnTo>
+                    <a:pt x="286490" y="2072404"/>
+                  </a:lnTo>
+                  <a:lnTo>
+                    <a:pt x="214867" y="2073418"/>
+                  </a:lnTo>
+                  <a:lnTo>
+                    <a:pt x="143245" y="2074431"/>
+                  </a:lnTo>
+                  <a:lnTo>
+                    <a:pt x="71622" y="2075443"/>
+                  </a:lnTo>
+                  <a:lnTo>
+                    <a:pt x="0" y="2076453"/>
                   </a:lnTo>
                   <a:close/>
                 </a:path>
@@ -4106,312 +4106,312 @@
           </p:nvSpPr>
           <p:spPr>
             <a:xfrm>
-              <a:off x="1172049" y="2758069"/>
-              <a:ext cx="7090630" cy="1968867"/>
+              <a:off x="1172049" y="2698546"/>
+              <a:ext cx="7090630" cy="2028597"/>
             </a:xfrm>
             <a:custGeom>
               <a:avLst/>
               <a:pathLst>
-                <a:path w="7090630" h="1968867">
+                <a:path w="7090630" h="2028597">
                   <a:moveTo>
                     <a:pt x="0" y="0"/>
                   </a:moveTo>
                   <a:lnTo>
-                    <a:pt x="71622" y="74488"/>
-                  </a:lnTo>
-                  <a:lnTo>
-                    <a:pt x="143245" y="146995"/>
-                  </a:lnTo>
-                  <a:lnTo>
-                    <a:pt x="214867" y="217572"/>
-                  </a:lnTo>
-                  <a:lnTo>
-                    <a:pt x="286490" y="286271"/>
-                  </a:lnTo>
-                  <a:lnTo>
-                    <a:pt x="358112" y="353142"/>
-                  </a:lnTo>
-                  <a:lnTo>
-                    <a:pt x="429735" y="418234"/>
-                  </a:lnTo>
-                  <a:lnTo>
-                    <a:pt x="501357" y="481593"/>
-                  </a:lnTo>
-                  <a:lnTo>
-                    <a:pt x="572980" y="543266"/>
-                  </a:lnTo>
-                  <a:lnTo>
-                    <a:pt x="644602" y="603298"/>
-                  </a:lnTo>
-                  <a:lnTo>
-                    <a:pt x="716225" y="661733"/>
-                  </a:lnTo>
-                  <a:lnTo>
-                    <a:pt x="787847" y="718612"/>
-                  </a:lnTo>
-                  <a:lnTo>
-                    <a:pt x="859470" y="773978"/>
-                  </a:lnTo>
-                  <a:lnTo>
-                    <a:pt x="931092" y="827871"/>
-                  </a:lnTo>
-                  <a:lnTo>
-                    <a:pt x="1002715" y="880329"/>
-                  </a:lnTo>
-                  <a:lnTo>
-                    <a:pt x="1074337" y="931392"/>
-                  </a:lnTo>
-                  <a:lnTo>
-                    <a:pt x="1145960" y="981095"/>
-                  </a:lnTo>
-                  <a:lnTo>
-                    <a:pt x="1217582" y="1029476"/>
-                  </a:lnTo>
-                  <a:lnTo>
-                    <a:pt x="1289205" y="1076570"/>
-                  </a:lnTo>
-                  <a:lnTo>
-                    <a:pt x="1360827" y="1122410"/>
-                  </a:lnTo>
-                  <a:lnTo>
-                    <a:pt x="1432450" y="1167031"/>
-                  </a:lnTo>
-                  <a:lnTo>
-                    <a:pt x="1504073" y="1210464"/>
-                  </a:lnTo>
-                  <a:lnTo>
-                    <a:pt x="1575695" y="1252741"/>
-                  </a:lnTo>
-                  <a:lnTo>
-                    <a:pt x="1647318" y="1293893"/>
-                  </a:lnTo>
-                  <a:lnTo>
-                    <a:pt x="1718940" y="1333950"/>
-                  </a:lnTo>
-                  <a:lnTo>
-                    <a:pt x="1790563" y="1372942"/>
-                  </a:lnTo>
-                  <a:lnTo>
-                    <a:pt x="1862185" y="1410895"/>
-                  </a:lnTo>
-                  <a:lnTo>
-                    <a:pt x="1933808" y="1447839"/>
-                  </a:lnTo>
-                  <a:lnTo>
-                    <a:pt x="2005430" y="1483799"/>
-                  </a:lnTo>
-                  <a:lnTo>
-                    <a:pt x="2077053" y="1518803"/>
-                  </a:lnTo>
-                  <a:lnTo>
-                    <a:pt x="2148675" y="1552875"/>
-                  </a:lnTo>
-                  <a:lnTo>
-                    <a:pt x="2220298" y="1586040"/>
-                  </a:lnTo>
-                  <a:lnTo>
-                    <a:pt x="2291920" y="1618323"/>
-                  </a:lnTo>
-                  <a:lnTo>
-                    <a:pt x="2363543" y="1649747"/>
-                  </a:lnTo>
-                  <a:lnTo>
-                    <a:pt x="2435165" y="1680334"/>
-                  </a:lnTo>
-                  <a:lnTo>
-                    <a:pt x="2506788" y="1710108"/>
-                  </a:lnTo>
-                  <a:lnTo>
-                    <a:pt x="2578410" y="1739089"/>
-                  </a:lnTo>
-                  <a:lnTo>
-                    <a:pt x="2650033" y="1767299"/>
-                  </a:lnTo>
-                  <a:lnTo>
-                    <a:pt x="2721655" y="1794759"/>
-                  </a:lnTo>
-                  <a:lnTo>
-                    <a:pt x="2793278" y="1821487"/>
-                  </a:lnTo>
-                  <a:lnTo>
-                    <a:pt x="2864901" y="1847505"/>
-                  </a:lnTo>
-                  <a:lnTo>
-                    <a:pt x="2936523" y="1872830"/>
-                  </a:lnTo>
-                  <a:lnTo>
-                    <a:pt x="3008146" y="1897481"/>
-                  </a:lnTo>
-                  <a:lnTo>
-                    <a:pt x="3079768" y="1921476"/>
-                  </a:lnTo>
-                  <a:lnTo>
-                    <a:pt x="3151391" y="1944832"/>
-                  </a:lnTo>
-                  <a:lnTo>
-                    <a:pt x="3223013" y="1967567"/>
-                  </a:lnTo>
-                  <a:lnTo>
-                    <a:pt x="3294636" y="1968867"/>
-                  </a:lnTo>
-                  <a:lnTo>
-                    <a:pt x="3366258" y="1967927"/>
-                  </a:lnTo>
-                  <a:lnTo>
-                    <a:pt x="3437881" y="1966986"/>
-                  </a:lnTo>
-                  <a:lnTo>
-                    <a:pt x="3509503" y="1966043"/>
-                  </a:lnTo>
-                  <a:lnTo>
-                    <a:pt x="3581126" y="1965100"/>
-                  </a:lnTo>
-                  <a:lnTo>
-                    <a:pt x="3652748" y="1964156"/>
-                  </a:lnTo>
-                  <a:lnTo>
-                    <a:pt x="3724371" y="1963210"/>
-                  </a:lnTo>
-                  <a:lnTo>
-                    <a:pt x="3795993" y="1962264"/>
-                  </a:lnTo>
-                  <a:lnTo>
-                    <a:pt x="3867616" y="1961316"/>
-                  </a:lnTo>
-                  <a:lnTo>
-                    <a:pt x="3939238" y="1960367"/>
-                  </a:lnTo>
-                  <a:lnTo>
-                    <a:pt x="4010861" y="1959417"/>
-                  </a:lnTo>
-                  <a:lnTo>
-                    <a:pt x="4082483" y="1958467"/>
-                  </a:lnTo>
-                  <a:lnTo>
-                    <a:pt x="4154106" y="1957515"/>
-                  </a:lnTo>
-                  <a:lnTo>
-                    <a:pt x="4225729" y="1956562"/>
-                  </a:lnTo>
-                  <a:lnTo>
-                    <a:pt x="4297351" y="1955608"/>
-                  </a:lnTo>
-                  <a:lnTo>
-                    <a:pt x="4368974" y="1954653"/>
-                  </a:lnTo>
-                  <a:lnTo>
-                    <a:pt x="4440596" y="1953696"/>
-                  </a:lnTo>
-                  <a:lnTo>
-                    <a:pt x="4512219" y="1952739"/>
-                  </a:lnTo>
-                  <a:lnTo>
-                    <a:pt x="4583841" y="1951781"/>
-                  </a:lnTo>
-                  <a:lnTo>
-                    <a:pt x="4655464" y="1950821"/>
-                  </a:lnTo>
-                  <a:lnTo>
-                    <a:pt x="4727086" y="1949861"/>
-                  </a:lnTo>
-                  <a:lnTo>
-                    <a:pt x="4798709" y="1948899"/>
-                  </a:lnTo>
-                  <a:lnTo>
-                    <a:pt x="4870331" y="1947936"/>
-                  </a:lnTo>
-                  <a:lnTo>
-                    <a:pt x="4941954" y="1946972"/>
-                  </a:lnTo>
-                  <a:lnTo>
-                    <a:pt x="5013576" y="1946007"/>
-                  </a:lnTo>
-                  <a:lnTo>
-                    <a:pt x="5085199" y="1945041"/>
-                  </a:lnTo>
-                  <a:lnTo>
-                    <a:pt x="5156821" y="1944074"/>
-                  </a:lnTo>
-                  <a:lnTo>
-                    <a:pt x="5228444" y="1943106"/>
-                  </a:lnTo>
-                  <a:lnTo>
-                    <a:pt x="5300066" y="1942137"/>
-                  </a:lnTo>
-                  <a:lnTo>
-                    <a:pt x="5371689" y="1941166"/>
-                  </a:lnTo>
-                  <a:lnTo>
-                    <a:pt x="5443311" y="1940195"/>
-                  </a:lnTo>
-                  <a:lnTo>
-                    <a:pt x="5514934" y="1939222"/>
-                  </a:lnTo>
-                  <a:lnTo>
-                    <a:pt x="5586557" y="1938249"/>
-                  </a:lnTo>
-                  <a:lnTo>
-                    <a:pt x="5658179" y="1937274"/>
-                  </a:lnTo>
-                  <a:lnTo>
-                    <a:pt x="5729802" y="1936298"/>
-                  </a:lnTo>
-                  <a:lnTo>
-                    <a:pt x="5801424" y="1935321"/>
-                  </a:lnTo>
-                  <a:lnTo>
-                    <a:pt x="5873047" y="1934343"/>
-                  </a:lnTo>
-                  <a:lnTo>
-                    <a:pt x="5944669" y="1933364"/>
-                  </a:lnTo>
-                  <a:lnTo>
-                    <a:pt x="6016292" y="1932383"/>
-                  </a:lnTo>
-                  <a:lnTo>
-                    <a:pt x="6087914" y="1931402"/>
-                  </a:lnTo>
-                  <a:lnTo>
-                    <a:pt x="6159537" y="1930419"/>
-                  </a:lnTo>
-                  <a:lnTo>
-                    <a:pt x="6231159" y="1929436"/>
-                  </a:lnTo>
-                  <a:lnTo>
-                    <a:pt x="6302782" y="1928451"/>
-                  </a:lnTo>
-                  <a:lnTo>
-                    <a:pt x="6374404" y="1927465"/>
-                  </a:lnTo>
-                  <a:lnTo>
-                    <a:pt x="6446027" y="1926478"/>
-                  </a:lnTo>
-                  <a:lnTo>
-                    <a:pt x="6517649" y="1925490"/>
-                  </a:lnTo>
-                  <a:lnTo>
-                    <a:pt x="6589272" y="1924500"/>
-                  </a:lnTo>
-                  <a:lnTo>
-                    <a:pt x="6660894" y="1923510"/>
-                  </a:lnTo>
-                  <a:lnTo>
-                    <a:pt x="6732517" y="1922519"/>
-                  </a:lnTo>
-                  <a:lnTo>
-                    <a:pt x="6804139" y="1921526"/>
-                  </a:lnTo>
-                  <a:lnTo>
-                    <a:pt x="6875762" y="1920532"/>
-                  </a:lnTo>
-                  <a:lnTo>
-                    <a:pt x="6947385" y="1919537"/>
-                  </a:lnTo>
-                  <a:lnTo>
-                    <a:pt x="7019007" y="1918541"/>
-                  </a:lnTo>
-                  <a:lnTo>
-                    <a:pt x="7090630" y="1917544"/>
+                    <a:pt x="71622" y="76859"/>
+                  </a:lnTo>
+                  <a:lnTo>
+                    <a:pt x="143245" y="151652"/>
+                  </a:lnTo>
+                  <a:lnTo>
+                    <a:pt x="214867" y="224433"/>
+                  </a:lnTo>
+                  <a:lnTo>
+                    <a:pt x="286490" y="295258"/>
+                  </a:lnTo>
+                  <a:lnTo>
+                    <a:pt x="358112" y="364179"/>
+                  </a:lnTo>
+                  <a:lnTo>
+                    <a:pt x="429735" y="431247"/>
+                  </a:lnTo>
+                  <a:lnTo>
+                    <a:pt x="501357" y="496512"/>
+                  </a:lnTo>
+                  <a:lnTo>
+                    <a:pt x="572980" y="560022"/>
+                  </a:lnTo>
+                  <a:lnTo>
+                    <a:pt x="644602" y="621824"/>
+                  </a:lnTo>
+                  <a:lnTo>
+                    <a:pt x="716225" y="681965"/>
+                  </a:lnTo>
+                  <a:lnTo>
+                    <a:pt x="787847" y="740489"/>
+                  </a:lnTo>
+                  <a:lnTo>
+                    <a:pt x="859470" y="797439"/>
+                  </a:lnTo>
+                  <a:lnTo>
+                    <a:pt x="931092" y="852859"/>
+                  </a:lnTo>
+                  <a:lnTo>
+                    <a:pt x="1002715" y="906788"/>
+                  </a:lnTo>
+                  <a:lnTo>
+                    <a:pt x="1074337" y="959267"/>
+                  </a:lnTo>
+                  <a:lnTo>
+                    <a:pt x="1145960" y="1010335"/>
+                  </a:lnTo>
+                  <a:lnTo>
+                    <a:pt x="1217582" y="1060031"/>
+                  </a:lnTo>
+                  <a:lnTo>
+                    <a:pt x="1289205" y="1108390"/>
+                  </a:lnTo>
+                  <a:lnTo>
+                    <a:pt x="1360827" y="1155449"/>
+                  </a:lnTo>
+                  <a:lnTo>
+                    <a:pt x="1432450" y="1201243"/>
+                  </a:lnTo>
+                  <a:lnTo>
+                    <a:pt x="1504073" y="1245805"/>
+                  </a:lnTo>
+                  <a:lnTo>
+                    <a:pt x="1575695" y="1289170"/>
+                  </a:lnTo>
+                  <a:lnTo>
+                    <a:pt x="1647318" y="1331368"/>
+                  </a:lnTo>
+                  <a:lnTo>
+                    <a:pt x="1718940" y="1372432"/>
+                  </a:lnTo>
+                  <a:lnTo>
+                    <a:pt x="1790563" y="1412392"/>
+                  </a:lnTo>
+                  <a:lnTo>
+                    <a:pt x="1862185" y="1451278"/>
+                  </a:lnTo>
+                  <a:lnTo>
+                    <a:pt x="1933808" y="1489118"/>
+                  </a:lnTo>
+                  <a:lnTo>
+                    <a:pt x="2005430" y="1525941"/>
+                  </a:lnTo>
+                  <a:lnTo>
+                    <a:pt x="2077053" y="1561773"/>
+                  </a:lnTo>
+                  <a:lnTo>
+                    <a:pt x="2148675" y="1596643"/>
+                  </a:lnTo>
+                  <a:lnTo>
+                    <a:pt x="2220298" y="1630574"/>
+                  </a:lnTo>
+                  <a:lnTo>
+                    <a:pt x="2291920" y="1663594"/>
+                  </a:lnTo>
+                  <a:lnTo>
+                    <a:pt x="2363543" y="1695726"/>
+                  </a:lnTo>
+                  <a:lnTo>
+                    <a:pt x="2435165" y="1726993"/>
+                  </a:lnTo>
+                  <a:lnTo>
+                    <a:pt x="2506788" y="1757421"/>
+                  </a:lnTo>
+                  <a:lnTo>
+                    <a:pt x="2578410" y="1787030"/>
+                  </a:lnTo>
+                  <a:lnTo>
+                    <a:pt x="2650033" y="1815843"/>
+                  </a:lnTo>
+                  <a:lnTo>
+                    <a:pt x="2721655" y="1843881"/>
+                  </a:lnTo>
+                  <a:lnTo>
+                    <a:pt x="2793278" y="1871166"/>
+                  </a:lnTo>
+                  <a:lnTo>
+                    <a:pt x="2864901" y="1897717"/>
+                  </a:lnTo>
+                  <a:lnTo>
+                    <a:pt x="2936523" y="1923554"/>
+                  </a:lnTo>
+                  <a:lnTo>
+                    <a:pt x="3008146" y="1948696"/>
+                  </a:lnTo>
+                  <a:lnTo>
+                    <a:pt x="3079768" y="1973163"/>
+                  </a:lnTo>
+                  <a:lnTo>
+                    <a:pt x="3151391" y="1996972"/>
+                  </a:lnTo>
+                  <a:lnTo>
+                    <a:pt x="3223013" y="2020140"/>
+                  </a:lnTo>
+                  <a:lnTo>
+                    <a:pt x="3294636" y="2028597"/>
+                  </a:lnTo>
+                  <a:lnTo>
+                    <a:pt x="3366258" y="2027525"/>
+                  </a:lnTo>
+                  <a:lnTo>
+                    <a:pt x="3437881" y="2026452"/>
+                  </a:lnTo>
+                  <a:lnTo>
+                    <a:pt x="3509503" y="2025377"/>
+                  </a:lnTo>
+                  <a:lnTo>
+                    <a:pt x="3581126" y="2024300"/>
+                  </a:lnTo>
+                  <a:lnTo>
+                    <a:pt x="3652748" y="2023222"/>
+                  </a:lnTo>
+                  <a:lnTo>
+                    <a:pt x="3724371" y="2022143"/>
+                  </a:lnTo>
+                  <a:lnTo>
+                    <a:pt x="3795993" y="2021063"/>
+                  </a:lnTo>
+                  <a:lnTo>
+                    <a:pt x="3867616" y="2019981"/>
+                  </a:lnTo>
+                  <a:lnTo>
+                    <a:pt x="3939238" y="2018897"/>
+                  </a:lnTo>
+                  <a:lnTo>
+                    <a:pt x="4010861" y="2017813"/>
+                  </a:lnTo>
+                  <a:lnTo>
+                    <a:pt x="4082483" y="2016727"/>
+                  </a:lnTo>
+                  <a:lnTo>
+                    <a:pt x="4154106" y="2015639"/>
+                  </a:lnTo>
+                  <a:lnTo>
+                    <a:pt x="4225729" y="2014550"/>
+                  </a:lnTo>
+                  <a:lnTo>
+                    <a:pt x="4297351" y="2013460"/>
+                  </a:lnTo>
+                  <a:lnTo>
+                    <a:pt x="4368974" y="2012368"/>
+                  </a:lnTo>
+                  <a:lnTo>
+                    <a:pt x="4440596" y="2011275"/>
+                  </a:lnTo>
+                  <a:lnTo>
+                    <a:pt x="4512219" y="2010180"/>
+                  </a:lnTo>
+                  <a:lnTo>
+                    <a:pt x="4583841" y="2009084"/>
+                  </a:lnTo>
+                  <a:lnTo>
+                    <a:pt x="4655464" y="2007987"/>
+                  </a:lnTo>
+                  <a:lnTo>
+                    <a:pt x="4727086" y="2006888"/>
+                  </a:lnTo>
+                  <a:lnTo>
+                    <a:pt x="4798709" y="2005788"/>
+                  </a:lnTo>
+                  <a:lnTo>
+                    <a:pt x="4870331" y="2004686"/>
+                  </a:lnTo>
+                  <a:lnTo>
+                    <a:pt x="4941954" y="2003583"/>
+                  </a:lnTo>
+                  <a:lnTo>
+                    <a:pt x="5013576" y="2002478"/>
+                  </a:lnTo>
+                  <a:lnTo>
+                    <a:pt x="5085199" y="2001372"/>
+                  </a:lnTo>
+                  <a:lnTo>
+                    <a:pt x="5156821" y="2000265"/>
+                  </a:lnTo>
+                  <a:lnTo>
+                    <a:pt x="5228444" y="1999156"/>
+                  </a:lnTo>
+                  <a:lnTo>
+                    <a:pt x="5300066" y="1998046"/>
+                  </a:lnTo>
+                  <a:lnTo>
+                    <a:pt x="5371689" y="1996934"/>
+                  </a:lnTo>
+                  <a:lnTo>
+                    <a:pt x="5443311" y="1995821"/>
+                  </a:lnTo>
+                  <a:lnTo>
+                    <a:pt x="5514934" y="1994706"/>
+                  </a:lnTo>
+                  <a:lnTo>
+                    <a:pt x="5586557" y="1993590"/>
+                  </a:lnTo>
+                  <a:lnTo>
+                    <a:pt x="5658179" y="1992473"/>
+                  </a:lnTo>
+                  <a:lnTo>
+                    <a:pt x="5729802" y="1991354"/>
+                  </a:lnTo>
+                  <a:lnTo>
+                    <a:pt x="5801424" y="1990234"/>
+                  </a:lnTo>
+                  <a:lnTo>
+                    <a:pt x="5873047" y="1989112"/>
+                  </a:lnTo>
+                  <a:lnTo>
+                    <a:pt x="5944669" y="1987989"/>
+                  </a:lnTo>
+                  <a:lnTo>
+                    <a:pt x="6016292" y="1986864"/>
+                  </a:lnTo>
+                  <a:lnTo>
+                    <a:pt x="6087914" y="1985738"/>
+                  </a:lnTo>
+                  <a:lnTo>
+                    <a:pt x="6159537" y="1984610"/>
+                  </a:lnTo>
+                  <a:lnTo>
+                    <a:pt x="6231159" y="1983481"/>
+                  </a:lnTo>
+                  <a:lnTo>
+                    <a:pt x="6302782" y="1982351"/>
+                  </a:lnTo>
+                  <a:lnTo>
+                    <a:pt x="6374404" y="1981219"/>
+                  </a:lnTo>
+                  <a:lnTo>
+                    <a:pt x="6446027" y="1980085"/>
+                  </a:lnTo>
+                  <a:lnTo>
+                    <a:pt x="6517649" y="1978951"/>
+                  </a:lnTo>
+                  <a:lnTo>
+                    <a:pt x="6589272" y="1977814"/>
+                  </a:lnTo>
+                  <a:lnTo>
+                    <a:pt x="6660894" y="1976676"/>
+                  </a:lnTo>
+                  <a:lnTo>
+                    <a:pt x="6732517" y="1975537"/>
+                  </a:lnTo>
+                  <a:lnTo>
+                    <a:pt x="6804139" y="1974396"/>
+                  </a:lnTo>
+                  <a:lnTo>
+                    <a:pt x="6875762" y="1973254"/>
+                  </a:lnTo>
+                  <a:lnTo>
+                    <a:pt x="6947385" y="1972110"/>
+                  </a:lnTo>
+                  <a:lnTo>
+                    <a:pt x="7019007" y="1970965"/>
+                  </a:lnTo>
+                  <a:lnTo>
+                    <a:pt x="7090630" y="1969819"/>
                   </a:lnTo>
                 </a:path>
               </a:pathLst>
@@ -4431,312 +4431,312 @@
           </p:nvSpPr>
           <p:spPr>
             <a:xfrm>
-              <a:off x="1172049" y="4727876"/>
-              <a:ext cx="7090630" cy="635557"/>
+              <a:off x="1172049" y="4728214"/>
+              <a:ext cx="7090630" cy="636559"/>
             </a:xfrm>
             <a:custGeom>
               <a:avLst/>
               <a:pathLst>
-                <a:path w="7090630" h="635557">
+                <a:path w="7090630" h="636559">
                   <a:moveTo>
-                    <a:pt x="7090630" y="635557"/>
+                    <a:pt x="7090630" y="636559"/>
                   </a:moveTo>
                   <a:lnTo>
-                    <a:pt x="7019007" y="630259"/>
-                  </a:lnTo>
-                  <a:lnTo>
-                    <a:pt x="6947385" y="624815"/>
-                  </a:lnTo>
-                  <a:lnTo>
-                    <a:pt x="6875762" y="619223"/>
-                  </a:lnTo>
-                  <a:lnTo>
-                    <a:pt x="6804139" y="613478"/>
-                  </a:lnTo>
-                  <a:lnTo>
-                    <a:pt x="6732517" y="607576"/>
-                  </a:lnTo>
-                  <a:lnTo>
-                    <a:pt x="6660894" y="601512"/>
-                  </a:lnTo>
-                  <a:lnTo>
-                    <a:pt x="6589272" y="595283"/>
-                  </a:lnTo>
-                  <a:lnTo>
-                    <a:pt x="6517649" y="588883"/>
-                  </a:lnTo>
-                  <a:lnTo>
-                    <a:pt x="6446027" y="582308"/>
-                  </a:lnTo>
-                  <a:lnTo>
-                    <a:pt x="6374404" y="575554"/>
-                  </a:lnTo>
-                  <a:lnTo>
-                    <a:pt x="6302782" y="568615"/>
-                  </a:lnTo>
-                  <a:lnTo>
-                    <a:pt x="6231159" y="561486"/>
-                  </a:lnTo>
-                  <a:lnTo>
-                    <a:pt x="6159537" y="554162"/>
-                  </a:lnTo>
-                  <a:lnTo>
-                    <a:pt x="6087914" y="546639"/>
-                  </a:lnTo>
-                  <a:lnTo>
-                    <a:pt x="6016292" y="538909"/>
-                  </a:lnTo>
-                  <a:lnTo>
-                    <a:pt x="5944669" y="530968"/>
-                  </a:lnTo>
-                  <a:lnTo>
-                    <a:pt x="5873047" y="522810"/>
-                  </a:lnTo>
-                  <a:lnTo>
-                    <a:pt x="5801424" y="514429"/>
-                  </a:lnTo>
-                  <a:lnTo>
-                    <a:pt x="5729802" y="505819"/>
-                  </a:lnTo>
-                  <a:lnTo>
-                    <a:pt x="5658179" y="496974"/>
-                  </a:lnTo>
-                  <a:lnTo>
-                    <a:pt x="5586557" y="487887"/>
-                  </a:lnTo>
-                  <a:lnTo>
-                    <a:pt x="5514934" y="478551"/>
-                  </a:lnTo>
-                  <a:lnTo>
-                    <a:pt x="5443311" y="468960"/>
-                  </a:lnTo>
-                  <a:lnTo>
-                    <a:pt x="5371689" y="459107"/>
-                  </a:lnTo>
-                  <a:lnTo>
-                    <a:pt x="5300066" y="448984"/>
-                  </a:lnTo>
-                  <a:lnTo>
-                    <a:pt x="5228444" y="438585"/>
-                  </a:lnTo>
-                  <a:lnTo>
-                    <a:pt x="5156821" y="427901"/>
-                  </a:lnTo>
-                  <a:lnTo>
-                    <a:pt x="5085199" y="416926"/>
-                  </a:lnTo>
-                  <a:lnTo>
-                    <a:pt x="5013576" y="405650"/>
-                  </a:lnTo>
-                  <a:lnTo>
-                    <a:pt x="4941954" y="394066"/>
-                  </a:lnTo>
-                  <a:lnTo>
-                    <a:pt x="4870331" y="382165"/>
-                  </a:lnTo>
-                  <a:lnTo>
-                    <a:pt x="4798709" y="369940"/>
-                  </a:lnTo>
-                  <a:lnTo>
-                    <a:pt x="4727086" y="357379"/>
-                  </a:lnTo>
-                  <a:lnTo>
-                    <a:pt x="4655464" y="344476"/>
-                  </a:lnTo>
-                  <a:lnTo>
-                    <a:pt x="4583841" y="331219"/>
-                  </a:lnTo>
-                  <a:lnTo>
-                    <a:pt x="4512219" y="317601"/>
-                  </a:lnTo>
-                  <a:lnTo>
-                    <a:pt x="4440596" y="303610"/>
-                  </a:lnTo>
-                  <a:lnTo>
-                    <a:pt x="4368974" y="289236"/>
-                  </a:lnTo>
-                  <a:lnTo>
-                    <a:pt x="4297351" y="274469"/>
-                  </a:lnTo>
-                  <a:lnTo>
-                    <a:pt x="4225729" y="259299"/>
-                  </a:lnTo>
-                  <a:lnTo>
-                    <a:pt x="4154106" y="243714"/>
-                  </a:lnTo>
-                  <a:lnTo>
-                    <a:pt x="4082483" y="227703"/>
-                  </a:lnTo>
-                  <a:lnTo>
-                    <a:pt x="4010861" y="211254"/>
-                  </a:lnTo>
-                  <a:lnTo>
-                    <a:pt x="3939238" y="194356"/>
-                  </a:lnTo>
-                  <a:lnTo>
-                    <a:pt x="3867616" y="176996"/>
-                  </a:lnTo>
-                  <a:lnTo>
-                    <a:pt x="3795993" y="159161"/>
-                  </a:lnTo>
-                  <a:lnTo>
-                    <a:pt x="3724371" y="140838"/>
-                  </a:lnTo>
-                  <a:lnTo>
-                    <a:pt x="3652748" y="122015"/>
-                  </a:lnTo>
-                  <a:lnTo>
-                    <a:pt x="3581126" y="102676"/>
-                  </a:lnTo>
-                  <a:lnTo>
-                    <a:pt x="3509503" y="82810"/>
-                  </a:lnTo>
-                  <a:lnTo>
-                    <a:pt x="3437881" y="62400"/>
-                  </a:lnTo>
-                  <a:lnTo>
-                    <a:pt x="3366258" y="41432"/>
-                  </a:lnTo>
-                  <a:lnTo>
-                    <a:pt x="3294636" y="19891"/>
+                    <a:pt x="7019007" y="631241"/>
+                  </a:lnTo>
+                  <a:lnTo>
+                    <a:pt x="6947385" y="625776"/>
+                  </a:lnTo>
+                  <a:lnTo>
+                    <a:pt x="6875762" y="620160"/>
+                  </a:lnTo>
+                  <a:lnTo>
+                    <a:pt x="6804139" y="614389"/>
+                  </a:lnTo>
+                  <a:lnTo>
+                    <a:pt x="6732517" y="608459"/>
+                  </a:lnTo>
+                  <a:lnTo>
+                    <a:pt x="6660894" y="602365"/>
+                  </a:lnTo>
+                  <a:lnTo>
+                    <a:pt x="6589272" y="596102"/>
+                  </a:lnTo>
+                  <a:lnTo>
+                    <a:pt x="6517649" y="589666"/>
+                  </a:lnTo>
+                  <a:lnTo>
+                    <a:pt x="6446027" y="583053"/>
+                  </a:lnTo>
+                  <a:lnTo>
+                    <a:pt x="6374404" y="576257"/>
+                  </a:lnTo>
+                  <a:lnTo>
+                    <a:pt x="6302782" y="569273"/>
+                  </a:lnTo>
+                  <a:lnTo>
+                    <a:pt x="6231159" y="562096"/>
+                  </a:lnTo>
+                  <a:lnTo>
+                    <a:pt x="6159537" y="554721"/>
+                  </a:lnTo>
+                  <a:lnTo>
+                    <a:pt x="6087914" y="547142"/>
+                  </a:lnTo>
+                  <a:lnTo>
+                    <a:pt x="6016292" y="539353"/>
+                  </a:lnTo>
+                  <a:lnTo>
+                    <a:pt x="5944669" y="531350"/>
+                  </a:lnTo>
+                  <a:lnTo>
+                    <a:pt x="5873047" y="523125"/>
+                  </a:lnTo>
+                  <a:lnTo>
+                    <a:pt x="5801424" y="514673"/>
+                  </a:lnTo>
+                  <a:lnTo>
+                    <a:pt x="5729802" y="505988"/>
+                  </a:lnTo>
+                  <a:lnTo>
+                    <a:pt x="5658179" y="497062"/>
+                  </a:lnTo>
+                  <a:lnTo>
+                    <a:pt x="5586557" y="487890"/>
+                  </a:lnTo>
+                  <a:lnTo>
+                    <a:pt x="5514934" y="478465"/>
+                  </a:lnTo>
+                  <a:lnTo>
+                    <a:pt x="5443311" y="468779"/>
+                  </a:lnTo>
+                  <a:lnTo>
+                    <a:pt x="5371689" y="458826"/>
+                  </a:lnTo>
+                  <a:lnTo>
+                    <a:pt x="5300066" y="448597"/>
+                  </a:lnTo>
+                  <a:lnTo>
+                    <a:pt x="5228444" y="438086"/>
+                  </a:lnTo>
+                  <a:lnTo>
+                    <a:pt x="5156821" y="427285"/>
+                  </a:lnTo>
+                  <a:lnTo>
+                    <a:pt x="5085199" y="416185"/>
+                  </a:lnTo>
+                  <a:lnTo>
+                    <a:pt x="5013576" y="404778"/>
+                  </a:lnTo>
+                  <a:lnTo>
+                    <a:pt x="4941954" y="393056"/>
+                  </a:lnTo>
+                  <a:lnTo>
+                    <a:pt x="4870331" y="381011"/>
+                  </a:lnTo>
+                  <a:lnTo>
+                    <a:pt x="4798709" y="368632"/>
+                  </a:lnTo>
+                  <a:lnTo>
+                    <a:pt x="4727086" y="355912"/>
+                  </a:lnTo>
+                  <a:lnTo>
+                    <a:pt x="4655464" y="342840"/>
+                  </a:lnTo>
+                  <a:lnTo>
+                    <a:pt x="4583841" y="329407"/>
+                  </a:lnTo>
+                  <a:lnTo>
+                    <a:pt x="4512219" y="315603"/>
+                  </a:lnTo>
+                  <a:lnTo>
+                    <a:pt x="4440596" y="301418"/>
+                  </a:lnTo>
+                  <a:lnTo>
+                    <a:pt x="4368974" y="286840"/>
+                  </a:lnTo>
+                  <a:lnTo>
+                    <a:pt x="4297351" y="271860"/>
+                  </a:lnTo>
+                  <a:lnTo>
+                    <a:pt x="4225729" y="256466"/>
+                  </a:lnTo>
+                  <a:lnTo>
+                    <a:pt x="4154106" y="240646"/>
+                  </a:lnTo>
+                  <a:lnTo>
+                    <a:pt x="4082483" y="224390"/>
+                  </a:lnTo>
+                  <a:lnTo>
+                    <a:pt x="4010861" y="207684"/>
+                  </a:lnTo>
+                  <a:lnTo>
+                    <a:pt x="3939238" y="190517"/>
+                  </a:lnTo>
+                  <a:lnTo>
+                    <a:pt x="3867616" y="172875"/>
+                  </a:lnTo>
+                  <a:lnTo>
+                    <a:pt x="3795993" y="154746"/>
+                  </a:lnTo>
+                  <a:lnTo>
+                    <a:pt x="3724371" y="136117"/>
+                  </a:lnTo>
+                  <a:lnTo>
+                    <a:pt x="3652748" y="116972"/>
+                  </a:lnTo>
+                  <a:lnTo>
+                    <a:pt x="3581126" y="97299"/>
+                  </a:lnTo>
+                  <a:lnTo>
+                    <a:pt x="3509503" y="77082"/>
+                  </a:lnTo>
+                  <a:lnTo>
+                    <a:pt x="3437881" y="56306"/>
+                  </a:lnTo>
+                  <a:lnTo>
+                    <a:pt x="3366258" y="34956"/>
+                  </a:lnTo>
+                  <a:lnTo>
+                    <a:pt x="3294636" y="13017"/>
                   </a:lnTo>
                   <a:lnTo>
                     <a:pt x="3223013" y="0"/>
                   </a:lnTo>
                   <a:lnTo>
-                    <a:pt x="3151391" y="938"/>
-                  </a:lnTo>
-                  <a:lnTo>
-                    <a:pt x="3079768" y="1874"/>
-                  </a:lnTo>
-                  <a:lnTo>
-                    <a:pt x="3008146" y="2810"/>
-                  </a:lnTo>
-                  <a:lnTo>
-                    <a:pt x="2936523" y="3745"/>
-                  </a:lnTo>
-                  <a:lnTo>
-                    <a:pt x="2864901" y="4679"/>
-                  </a:lnTo>
-                  <a:lnTo>
-                    <a:pt x="2793278" y="5612"/>
-                  </a:lnTo>
-                  <a:lnTo>
-                    <a:pt x="2721655" y="6543"/>
-                  </a:lnTo>
-                  <a:lnTo>
-                    <a:pt x="2650033" y="7474"/>
-                  </a:lnTo>
-                  <a:lnTo>
-                    <a:pt x="2578410" y="8403"/>
-                  </a:lnTo>
-                  <a:lnTo>
-                    <a:pt x="2506788" y="9332"/>
-                  </a:lnTo>
-                  <a:lnTo>
-                    <a:pt x="2435165" y="10259"/>
-                  </a:lnTo>
-                  <a:lnTo>
-                    <a:pt x="2363543" y="11186"/>
-                  </a:lnTo>
-                  <a:lnTo>
-                    <a:pt x="2291920" y="12111"/>
-                  </a:lnTo>
-                  <a:lnTo>
-                    <a:pt x="2220298" y="13036"/>
-                  </a:lnTo>
-                  <a:lnTo>
-                    <a:pt x="2148675" y="13959"/>
-                  </a:lnTo>
-                  <a:lnTo>
-                    <a:pt x="2077053" y="14881"/>
-                  </a:lnTo>
-                  <a:lnTo>
-                    <a:pt x="2005430" y="15802"/>
-                  </a:lnTo>
-                  <a:lnTo>
-                    <a:pt x="1933808" y="16722"/>
-                  </a:lnTo>
-                  <a:lnTo>
-                    <a:pt x="1862185" y="17641"/>
-                  </a:lnTo>
-                  <a:lnTo>
-                    <a:pt x="1790563" y="18559"/>
-                  </a:lnTo>
-                  <a:lnTo>
-                    <a:pt x="1718940" y="19476"/>
-                  </a:lnTo>
-                  <a:lnTo>
-                    <a:pt x="1647318" y="20392"/>
-                  </a:lnTo>
-                  <a:lnTo>
-                    <a:pt x="1575695" y="21307"/>
-                  </a:lnTo>
-                  <a:lnTo>
-                    <a:pt x="1504073" y="22221"/>
-                  </a:lnTo>
-                  <a:lnTo>
-                    <a:pt x="1432450" y="23134"/>
-                  </a:lnTo>
-                  <a:lnTo>
-                    <a:pt x="1360827" y="24046"/>
-                  </a:lnTo>
-                  <a:lnTo>
-                    <a:pt x="1289205" y="24957"/>
-                  </a:lnTo>
-                  <a:lnTo>
-                    <a:pt x="1217582" y="25867"/>
-                  </a:lnTo>
-                  <a:lnTo>
-                    <a:pt x="1145960" y="26775"/>
-                  </a:lnTo>
-                  <a:lnTo>
-                    <a:pt x="1074337" y="27683"/>
-                  </a:lnTo>
-                  <a:lnTo>
-                    <a:pt x="1002715" y="28590"/>
-                  </a:lnTo>
-                  <a:lnTo>
-                    <a:pt x="931092" y="29495"/>
-                  </a:lnTo>
-                  <a:lnTo>
-                    <a:pt x="859470" y="30400"/>
-                  </a:lnTo>
-                  <a:lnTo>
-                    <a:pt x="787847" y="31304"/>
-                  </a:lnTo>
-                  <a:lnTo>
-                    <a:pt x="716225" y="32206"/>
-                  </a:lnTo>
-                  <a:lnTo>
-                    <a:pt x="644602" y="33108"/>
-                  </a:lnTo>
-                  <a:lnTo>
-                    <a:pt x="572980" y="34009"/>
-                  </a:lnTo>
-                  <a:lnTo>
-                    <a:pt x="501357" y="34908"/>
-                  </a:lnTo>
-                  <a:lnTo>
-                    <a:pt x="429735" y="35807"/>
-                  </a:lnTo>
-                  <a:lnTo>
-                    <a:pt x="358112" y="36704"/>
-                  </a:lnTo>
-                  <a:lnTo>
-                    <a:pt x="286490" y="37601"/>
-                  </a:lnTo>
-                  <a:lnTo>
-                    <a:pt x="214867" y="38496"/>
-                  </a:lnTo>
-                  <a:lnTo>
-                    <a:pt x="143245" y="39391"/>
-                  </a:lnTo>
-                  <a:lnTo>
-                    <a:pt x="71622" y="40284"/>
-                  </a:lnTo>
-                  <a:lnTo>
-                    <a:pt x="0" y="41176"/>
+                    <a:pt x="3151391" y="1069"/>
+                  </a:lnTo>
+                  <a:lnTo>
+                    <a:pt x="3079768" y="2137"/>
+                  </a:lnTo>
+                  <a:lnTo>
+                    <a:pt x="3008146" y="3204"/>
+                  </a:lnTo>
+                  <a:lnTo>
+                    <a:pt x="2936523" y="4269"/>
+                  </a:lnTo>
+                  <a:lnTo>
+                    <a:pt x="2864901" y="5333"/>
+                  </a:lnTo>
+                  <a:lnTo>
+                    <a:pt x="2793278" y="6396"/>
+                  </a:lnTo>
+                  <a:lnTo>
+                    <a:pt x="2721655" y="7457"/>
+                  </a:lnTo>
+                  <a:lnTo>
+                    <a:pt x="2650033" y="8517"/>
+                  </a:lnTo>
+                  <a:lnTo>
+                    <a:pt x="2578410" y="9575"/>
+                  </a:lnTo>
+                  <a:lnTo>
+                    <a:pt x="2506788" y="10632"/>
+                  </a:lnTo>
+                  <a:lnTo>
+                    <a:pt x="2435165" y="11688"/>
+                  </a:lnTo>
+                  <a:lnTo>
+                    <a:pt x="2363543" y="12742"/>
+                  </a:lnTo>
+                  <a:lnTo>
+                    <a:pt x="2291920" y="13795"/>
+                  </a:lnTo>
+                  <a:lnTo>
+                    <a:pt x="2220298" y="14847"/>
+                  </a:lnTo>
+                  <a:lnTo>
+                    <a:pt x="2148675" y="15897"/>
+                  </a:lnTo>
+                  <a:lnTo>
+                    <a:pt x="2077053" y="16946"/>
+                  </a:lnTo>
+                  <a:lnTo>
+                    <a:pt x="2005430" y="17994"/>
+                  </a:lnTo>
+                  <a:lnTo>
+                    <a:pt x="1933808" y="19040"/>
+                  </a:lnTo>
+                  <a:lnTo>
+                    <a:pt x="1862185" y="20085"/>
+                  </a:lnTo>
+                  <a:lnTo>
+                    <a:pt x="1790563" y="21129"/>
+                  </a:lnTo>
+                  <a:lnTo>
+                    <a:pt x="1718940" y="22171"/>
+                  </a:lnTo>
+                  <a:lnTo>
+                    <a:pt x="1647318" y="23212"/>
+                  </a:lnTo>
+                  <a:lnTo>
+                    <a:pt x="1575695" y="24251"/>
+                  </a:lnTo>
+                  <a:lnTo>
+                    <a:pt x="1504073" y="25289"/>
+                  </a:lnTo>
+                  <a:lnTo>
+                    <a:pt x="1432450" y="26326"/>
+                  </a:lnTo>
+                  <a:lnTo>
+                    <a:pt x="1360827" y="27362"/>
+                  </a:lnTo>
+                  <a:lnTo>
+                    <a:pt x="1289205" y="28396"/>
+                  </a:lnTo>
+                  <a:lnTo>
+                    <a:pt x="1217582" y="29429"/>
+                  </a:lnTo>
+                  <a:lnTo>
+                    <a:pt x="1145960" y="30460"/>
+                  </a:lnTo>
+                  <a:lnTo>
+                    <a:pt x="1074337" y="31490"/>
+                  </a:lnTo>
+                  <a:lnTo>
+                    <a:pt x="1002715" y="32519"/>
+                  </a:lnTo>
+                  <a:lnTo>
+                    <a:pt x="931092" y="33547"/>
+                  </a:lnTo>
+                  <a:lnTo>
+                    <a:pt x="859470" y="34573"/>
+                  </a:lnTo>
+                  <a:lnTo>
+                    <a:pt x="787847" y="35598"/>
+                  </a:lnTo>
+                  <a:lnTo>
+                    <a:pt x="716225" y="36621"/>
+                  </a:lnTo>
+                  <a:lnTo>
+                    <a:pt x="644602" y="37643"/>
+                  </a:lnTo>
+                  <a:lnTo>
+                    <a:pt x="572980" y="38664"/>
+                  </a:lnTo>
+                  <a:lnTo>
+                    <a:pt x="501357" y="39684"/>
+                  </a:lnTo>
+                  <a:lnTo>
+                    <a:pt x="429735" y="40702"/>
+                  </a:lnTo>
+                  <a:lnTo>
+                    <a:pt x="358112" y="41719"/>
+                  </a:lnTo>
+                  <a:lnTo>
+                    <a:pt x="286490" y="42735"/>
+                  </a:lnTo>
+                  <a:lnTo>
+                    <a:pt x="214867" y="43749"/>
+                  </a:lnTo>
+                  <a:lnTo>
+                    <a:pt x="143245" y="44762"/>
+                  </a:lnTo>
+                  <a:lnTo>
+                    <a:pt x="71622" y="45774"/>
+                  </a:lnTo>
+                  <a:lnTo>
+                    <a:pt x="0" y="46784"/>
                   </a:lnTo>
                 </a:path>
               </a:pathLst>
@@ -4756,312 +4756,312 @@
           </p:nvSpPr>
           <p:spPr>
             <a:xfrm>
-              <a:off x="1172049" y="4071886"/>
-              <a:ext cx="7090630" cy="1071993"/>
+              <a:off x="1172049" y="4061849"/>
+              <a:ext cx="7090630" cy="1081771"/>
             </a:xfrm>
             <a:custGeom>
               <a:avLst/>
               <a:pathLst>
-                <a:path w="7090630" h="1071993">
+                <a:path w="7090630" h="1081771">
                   <a:moveTo>
                     <a:pt x="0" y="0"/>
                   </a:moveTo>
                   <a:lnTo>
-                    <a:pt x="71622" y="19067"/>
-                  </a:lnTo>
-                  <a:lnTo>
-                    <a:pt x="143245" y="37889"/>
-                  </a:lnTo>
-                  <a:lnTo>
-                    <a:pt x="214867" y="56470"/>
-                  </a:lnTo>
-                  <a:lnTo>
-                    <a:pt x="286490" y="74813"/>
-                  </a:lnTo>
-                  <a:lnTo>
-                    <a:pt x="358112" y="92920"/>
-                  </a:lnTo>
-                  <a:lnTo>
-                    <a:pt x="429735" y="110794"/>
-                  </a:lnTo>
-                  <a:lnTo>
-                    <a:pt x="501357" y="128439"/>
-                  </a:lnTo>
-                  <a:lnTo>
-                    <a:pt x="572980" y="145858"/>
-                  </a:lnTo>
-                  <a:lnTo>
-                    <a:pt x="644602" y="163053"/>
-                  </a:lnTo>
-                  <a:lnTo>
-                    <a:pt x="716225" y="180027"/>
-                  </a:lnTo>
-                  <a:lnTo>
-                    <a:pt x="787847" y="196783"/>
-                  </a:lnTo>
-                  <a:lnTo>
-                    <a:pt x="859470" y="213325"/>
-                  </a:lnTo>
-                  <a:lnTo>
-                    <a:pt x="931092" y="229654"/>
-                  </a:lnTo>
-                  <a:lnTo>
-                    <a:pt x="1002715" y="245773"/>
-                  </a:lnTo>
-                  <a:lnTo>
-                    <a:pt x="1074337" y="261685"/>
-                  </a:lnTo>
-                  <a:lnTo>
-                    <a:pt x="1145960" y="277393"/>
-                  </a:lnTo>
-                  <a:lnTo>
-                    <a:pt x="1217582" y="292900"/>
-                  </a:lnTo>
-                  <a:lnTo>
-                    <a:pt x="1289205" y="308207"/>
-                  </a:lnTo>
-                  <a:lnTo>
-                    <a:pt x="1360827" y="323318"/>
-                  </a:lnTo>
-                  <a:lnTo>
-                    <a:pt x="1432450" y="338235"/>
-                  </a:lnTo>
-                  <a:lnTo>
-                    <a:pt x="1504073" y="352961"/>
-                  </a:lnTo>
-                  <a:lnTo>
-                    <a:pt x="1575695" y="367497"/>
-                  </a:lnTo>
-                  <a:lnTo>
-                    <a:pt x="1647318" y="381847"/>
-                  </a:lnTo>
-                  <a:lnTo>
-                    <a:pt x="1718940" y="396013"/>
-                  </a:lnTo>
-                  <a:lnTo>
-                    <a:pt x="1790563" y="409996"/>
-                  </a:lnTo>
-                  <a:lnTo>
-                    <a:pt x="1862185" y="423801"/>
-                  </a:lnTo>
-                  <a:lnTo>
-                    <a:pt x="1933808" y="437428"/>
-                  </a:lnTo>
-                  <a:lnTo>
-                    <a:pt x="2005430" y="450880"/>
-                  </a:lnTo>
-                  <a:lnTo>
-                    <a:pt x="2077053" y="464159"/>
-                  </a:lnTo>
-                  <a:lnTo>
-                    <a:pt x="2148675" y="477268"/>
-                  </a:lnTo>
-                  <a:lnTo>
-                    <a:pt x="2220298" y="490209"/>
-                  </a:lnTo>
-                  <a:lnTo>
-                    <a:pt x="2291920" y="502984"/>
-                  </a:lnTo>
-                  <a:lnTo>
-                    <a:pt x="2363543" y="515594"/>
-                  </a:lnTo>
-                  <a:lnTo>
-                    <a:pt x="2435165" y="528043"/>
-                  </a:lnTo>
-                  <a:lnTo>
-                    <a:pt x="2506788" y="540332"/>
-                  </a:lnTo>
-                  <a:lnTo>
-                    <a:pt x="2578410" y="552463"/>
-                  </a:lnTo>
-                  <a:lnTo>
-                    <a:pt x="2650033" y="564439"/>
-                  </a:lnTo>
-                  <a:lnTo>
-                    <a:pt x="2721655" y="576260"/>
-                  </a:lnTo>
-                  <a:lnTo>
-                    <a:pt x="2793278" y="587930"/>
-                  </a:lnTo>
-                  <a:lnTo>
-                    <a:pt x="2864901" y="599450"/>
-                  </a:lnTo>
-                  <a:lnTo>
-                    <a:pt x="2936523" y="610823"/>
-                  </a:lnTo>
-                  <a:lnTo>
-                    <a:pt x="3008146" y="622049"/>
-                  </a:lnTo>
-                  <a:lnTo>
-                    <a:pt x="3079768" y="633131"/>
-                  </a:lnTo>
-                  <a:lnTo>
-                    <a:pt x="3151391" y="644071"/>
-                  </a:lnTo>
-                  <a:lnTo>
-                    <a:pt x="3223013" y="654871"/>
-                  </a:lnTo>
-                  <a:lnTo>
-                    <a:pt x="3294636" y="665532"/>
-                  </a:lnTo>
-                  <a:lnTo>
-                    <a:pt x="3366258" y="676056"/>
-                  </a:lnTo>
-                  <a:lnTo>
-                    <a:pt x="3437881" y="686444"/>
-                  </a:lnTo>
-                  <a:lnTo>
-                    <a:pt x="3509503" y="696700"/>
-                  </a:lnTo>
-                  <a:lnTo>
-                    <a:pt x="3581126" y="706824"/>
-                  </a:lnTo>
-                  <a:lnTo>
-                    <a:pt x="3652748" y="716818"/>
-                  </a:lnTo>
-                  <a:lnTo>
-                    <a:pt x="3724371" y="726684"/>
-                  </a:lnTo>
-                  <a:lnTo>
-                    <a:pt x="3795993" y="736423"/>
-                  </a:lnTo>
-                  <a:lnTo>
-                    <a:pt x="3867616" y="746037"/>
-                  </a:lnTo>
-                  <a:lnTo>
-                    <a:pt x="3939238" y="755527"/>
-                  </a:lnTo>
-                  <a:lnTo>
-                    <a:pt x="4010861" y="764896"/>
-                  </a:lnTo>
-                  <a:lnTo>
-                    <a:pt x="4082483" y="774144"/>
-                  </a:lnTo>
-                  <a:lnTo>
-                    <a:pt x="4154106" y="783274"/>
-                  </a:lnTo>
-                  <a:lnTo>
-                    <a:pt x="4225729" y="792287"/>
-                  </a:lnTo>
-                  <a:lnTo>
-                    <a:pt x="4297351" y="801184"/>
-                  </a:lnTo>
-                  <a:lnTo>
-                    <a:pt x="4368974" y="809966"/>
-                  </a:lnTo>
-                  <a:lnTo>
-                    <a:pt x="4440596" y="818636"/>
-                  </a:lnTo>
-                  <a:lnTo>
-                    <a:pt x="4512219" y="827195"/>
-                  </a:lnTo>
-                  <a:lnTo>
-                    <a:pt x="4583841" y="835644"/>
-                  </a:lnTo>
-                  <a:lnTo>
-                    <a:pt x="4655464" y="843984"/>
-                  </a:lnTo>
-                  <a:lnTo>
-                    <a:pt x="4727086" y="852217"/>
-                  </a:lnTo>
-                  <a:lnTo>
-                    <a:pt x="4798709" y="860345"/>
-                  </a:lnTo>
-                  <a:lnTo>
-                    <a:pt x="4870331" y="868368"/>
-                  </a:lnTo>
-                  <a:lnTo>
-                    <a:pt x="4941954" y="876288"/>
-                  </a:lnTo>
-                  <a:lnTo>
-                    <a:pt x="5013576" y="884107"/>
-                  </a:lnTo>
-                  <a:lnTo>
-                    <a:pt x="5085199" y="891825"/>
-                  </a:lnTo>
-                  <a:lnTo>
-                    <a:pt x="5156821" y="899444"/>
-                  </a:lnTo>
-                  <a:lnTo>
-                    <a:pt x="5228444" y="906966"/>
-                  </a:lnTo>
-                  <a:lnTo>
-                    <a:pt x="5300066" y="914390"/>
-                  </a:lnTo>
-                  <a:lnTo>
-                    <a:pt x="5371689" y="921720"/>
-                  </a:lnTo>
-                  <a:lnTo>
-                    <a:pt x="5443311" y="928955"/>
-                  </a:lnTo>
-                  <a:lnTo>
-                    <a:pt x="5514934" y="936098"/>
-                  </a:lnTo>
-                  <a:lnTo>
-                    <a:pt x="5586557" y="943149"/>
-                  </a:lnTo>
-                  <a:lnTo>
-                    <a:pt x="5658179" y="950109"/>
-                  </a:lnTo>
-                  <a:lnTo>
-                    <a:pt x="5729802" y="956980"/>
-                  </a:lnTo>
-                  <a:lnTo>
-                    <a:pt x="5801424" y="963763"/>
-                  </a:lnTo>
-                  <a:lnTo>
-                    <a:pt x="5873047" y="970458"/>
-                  </a:lnTo>
-                  <a:lnTo>
-                    <a:pt x="5944669" y="977068"/>
-                  </a:lnTo>
-                  <a:lnTo>
-                    <a:pt x="6016292" y="983593"/>
-                  </a:lnTo>
-                  <a:lnTo>
-                    <a:pt x="6087914" y="990034"/>
-                  </a:lnTo>
-                  <a:lnTo>
-                    <a:pt x="6159537" y="996392"/>
-                  </a:lnTo>
-                  <a:lnTo>
-                    <a:pt x="6231159" y="1002669"/>
-                  </a:lnTo>
-                  <a:lnTo>
-                    <a:pt x="6302782" y="1008865"/>
-                  </a:lnTo>
-                  <a:lnTo>
-                    <a:pt x="6374404" y="1014982"/>
-                  </a:lnTo>
-                  <a:lnTo>
-                    <a:pt x="6446027" y="1021020"/>
-                  </a:lnTo>
-                  <a:lnTo>
-                    <a:pt x="6517649" y="1026981"/>
-                  </a:lnTo>
-                  <a:lnTo>
-                    <a:pt x="6589272" y="1032865"/>
-                  </a:lnTo>
-                  <a:lnTo>
-                    <a:pt x="6660894" y="1038674"/>
-                  </a:lnTo>
-                  <a:lnTo>
-                    <a:pt x="6732517" y="1044408"/>
-                  </a:lnTo>
-                  <a:lnTo>
-                    <a:pt x="6804139" y="1050068"/>
-                  </a:lnTo>
-                  <a:lnTo>
-                    <a:pt x="6875762" y="1055656"/>
-                  </a:lnTo>
-                  <a:lnTo>
-                    <a:pt x="6947385" y="1061172"/>
-                  </a:lnTo>
-                  <a:lnTo>
-                    <a:pt x="7019007" y="1066617"/>
-                  </a:lnTo>
-                  <a:lnTo>
-                    <a:pt x="7090630" y="1071993"/>
+                    <a:pt x="71622" y="19287"/>
+                  </a:lnTo>
+                  <a:lnTo>
+                    <a:pt x="143245" y="38325"/>
+                  </a:lnTo>
+                  <a:lnTo>
+                    <a:pt x="214867" y="57118"/>
+                  </a:lnTo>
+                  <a:lnTo>
+                    <a:pt x="286490" y="75669"/>
+                  </a:lnTo>
+                  <a:lnTo>
+                    <a:pt x="358112" y="93980"/>
+                  </a:lnTo>
+                  <a:lnTo>
+                    <a:pt x="429735" y="112055"/>
+                  </a:lnTo>
+                  <a:lnTo>
+                    <a:pt x="501357" y="129897"/>
+                  </a:lnTo>
+                  <a:lnTo>
+                    <a:pt x="572980" y="147509"/>
+                  </a:lnTo>
+                  <a:lnTo>
+                    <a:pt x="644602" y="164894"/>
+                  </a:lnTo>
+                  <a:lnTo>
+                    <a:pt x="716225" y="182054"/>
+                  </a:lnTo>
+                  <a:lnTo>
+                    <a:pt x="787847" y="198993"/>
+                  </a:lnTo>
+                  <a:lnTo>
+                    <a:pt x="859470" y="215714"/>
+                  </a:lnTo>
+                  <a:lnTo>
+                    <a:pt x="931092" y="232219"/>
+                  </a:lnTo>
+                  <a:lnTo>
+                    <a:pt x="1002715" y="248511"/>
+                  </a:lnTo>
+                  <a:lnTo>
+                    <a:pt x="1074337" y="264593"/>
+                  </a:lnTo>
+                  <a:lnTo>
+                    <a:pt x="1145960" y="280468"/>
+                  </a:lnTo>
+                  <a:lnTo>
+                    <a:pt x="1217582" y="296138"/>
+                  </a:lnTo>
+                  <a:lnTo>
+                    <a:pt x="1289205" y="311606"/>
+                  </a:lnTo>
+                  <a:lnTo>
+                    <a:pt x="1360827" y="326874"/>
+                  </a:lnTo>
+                  <a:lnTo>
+                    <a:pt x="1432450" y="341945"/>
+                  </a:lnTo>
+                  <a:lnTo>
+                    <a:pt x="1504073" y="356822"/>
+                  </a:lnTo>
+                  <a:lnTo>
+                    <a:pt x="1575695" y="371507"/>
+                  </a:lnTo>
+                  <a:lnTo>
+                    <a:pt x="1647318" y="386003"/>
+                  </a:lnTo>
+                  <a:lnTo>
+                    <a:pt x="1718940" y="400311"/>
+                  </a:lnTo>
+                  <a:lnTo>
+                    <a:pt x="1790563" y="414436"/>
+                  </a:lnTo>
+                  <a:lnTo>
+                    <a:pt x="1862185" y="428378"/>
+                  </a:lnTo>
+                  <a:lnTo>
+                    <a:pt x="1933808" y="442140"/>
+                  </a:lnTo>
+                  <a:lnTo>
+                    <a:pt x="2005430" y="455724"/>
+                  </a:lnTo>
+                  <a:lnTo>
+                    <a:pt x="2077053" y="469134"/>
+                  </a:lnTo>
+                  <a:lnTo>
+                    <a:pt x="2148675" y="482370"/>
+                  </a:lnTo>
+                  <a:lnTo>
+                    <a:pt x="2220298" y="495436"/>
+                  </a:lnTo>
+                  <a:lnTo>
+                    <a:pt x="2291920" y="508333"/>
+                  </a:lnTo>
+                  <a:lnTo>
+                    <a:pt x="2363543" y="521064"/>
+                  </a:lnTo>
+                  <a:lnTo>
+                    <a:pt x="2435165" y="533631"/>
+                  </a:lnTo>
+                  <a:lnTo>
+                    <a:pt x="2506788" y="546036"/>
+                  </a:lnTo>
+                  <a:lnTo>
+                    <a:pt x="2578410" y="558280"/>
+                  </a:lnTo>
+                  <a:lnTo>
+                    <a:pt x="2650033" y="570367"/>
+                  </a:lnTo>
+                  <a:lnTo>
+                    <a:pt x="2721655" y="582298"/>
+                  </a:lnTo>
+                  <a:lnTo>
+                    <a:pt x="2793278" y="594075"/>
+                  </a:lnTo>
+                  <a:lnTo>
+                    <a:pt x="2864901" y="605700"/>
+                  </a:lnTo>
+                  <a:lnTo>
+                    <a:pt x="2936523" y="617175"/>
+                  </a:lnTo>
+                  <a:lnTo>
+                    <a:pt x="3008146" y="628502"/>
+                  </a:lnTo>
+                  <a:lnTo>
+                    <a:pt x="3079768" y="639683"/>
+                  </a:lnTo>
+                  <a:lnTo>
+                    <a:pt x="3151391" y="650720"/>
+                  </a:lnTo>
+                  <a:lnTo>
+                    <a:pt x="3223013" y="661614"/>
+                  </a:lnTo>
+                  <a:lnTo>
+                    <a:pt x="3294636" y="672368"/>
+                  </a:lnTo>
+                  <a:lnTo>
+                    <a:pt x="3366258" y="682983"/>
+                  </a:lnTo>
+                  <a:lnTo>
+                    <a:pt x="3437881" y="693462"/>
+                  </a:lnTo>
+                  <a:lnTo>
+                    <a:pt x="3509503" y="703805"/>
+                  </a:lnTo>
+                  <a:lnTo>
+                    <a:pt x="3581126" y="714015"/>
+                  </a:lnTo>
+                  <a:lnTo>
+                    <a:pt x="3652748" y="724093"/>
+                  </a:lnTo>
+                  <a:lnTo>
+                    <a:pt x="3724371" y="734041"/>
+                  </a:lnTo>
+                  <a:lnTo>
+                    <a:pt x="3795993" y="743861"/>
+                  </a:lnTo>
+                  <a:lnTo>
+                    <a:pt x="3867616" y="753554"/>
+                  </a:lnTo>
+                  <a:lnTo>
+                    <a:pt x="3939238" y="763122"/>
+                  </a:lnTo>
+                  <a:lnTo>
+                    <a:pt x="4010861" y="772567"/>
+                  </a:lnTo>
+                  <a:lnTo>
+                    <a:pt x="4082483" y="781890"/>
+                  </a:lnTo>
+                  <a:lnTo>
+                    <a:pt x="4154106" y="791092"/>
+                  </a:lnTo>
+                  <a:lnTo>
+                    <a:pt x="4225729" y="800176"/>
+                  </a:lnTo>
+                  <a:lnTo>
+                    <a:pt x="4297351" y="809143"/>
+                  </a:lnTo>
+                  <a:lnTo>
+                    <a:pt x="4368974" y="817994"/>
+                  </a:lnTo>
+                  <a:lnTo>
+                    <a:pt x="4440596" y="826731"/>
+                  </a:lnTo>
+                  <a:lnTo>
+                    <a:pt x="4512219" y="835355"/>
+                  </a:lnTo>
+                  <a:lnTo>
+                    <a:pt x="4583841" y="843868"/>
+                  </a:lnTo>
+                  <a:lnTo>
+                    <a:pt x="4655464" y="852272"/>
+                  </a:lnTo>
+                  <a:lnTo>
+                    <a:pt x="4727086" y="860567"/>
+                  </a:lnTo>
+                  <a:lnTo>
+                    <a:pt x="4798709" y="868755"/>
+                  </a:lnTo>
+                  <a:lnTo>
+                    <a:pt x="4870331" y="876837"/>
+                  </a:lnTo>
+                  <a:lnTo>
+                    <a:pt x="4941954" y="884815"/>
+                  </a:lnTo>
+                  <a:lnTo>
+                    <a:pt x="5013576" y="892690"/>
+                  </a:lnTo>
+                  <a:lnTo>
+                    <a:pt x="5085199" y="900464"/>
+                  </a:lnTo>
+                  <a:lnTo>
+                    <a:pt x="5156821" y="908137"/>
+                  </a:lnTo>
+                  <a:lnTo>
+                    <a:pt x="5228444" y="915711"/>
+                  </a:lnTo>
+                  <a:lnTo>
+                    <a:pt x="5300066" y="923188"/>
+                  </a:lnTo>
+                  <a:lnTo>
+                    <a:pt x="5371689" y="930568"/>
+                  </a:lnTo>
+                  <a:lnTo>
+                    <a:pt x="5443311" y="937853"/>
+                  </a:lnTo>
+                  <a:lnTo>
+                    <a:pt x="5514934" y="945044"/>
+                  </a:lnTo>
+                  <a:lnTo>
+                    <a:pt x="5586557" y="952143"/>
+                  </a:lnTo>
+                  <a:lnTo>
+                    <a:pt x="5658179" y="959149"/>
+                  </a:lnTo>
+                  <a:lnTo>
+                    <a:pt x="5729802" y="966066"/>
+                  </a:lnTo>
+                  <a:lnTo>
+                    <a:pt x="5801424" y="972893"/>
+                  </a:lnTo>
+                  <a:lnTo>
+                    <a:pt x="5873047" y="979632"/>
+                  </a:lnTo>
+                  <a:lnTo>
+                    <a:pt x="5944669" y="986284"/>
+                  </a:lnTo>
+                  <a:lnTo>
+                    <a:pt x="6016292" y="992851"/>
+                  </a:lnTo>
+                  <a:lnTo>
+                    <a:pt x="6087914" y="999333"/>
+                  </a:lnTo>
+                  <a:lnTo>
+                    <a:pt x="6159537" y="1005731"/>
+                  </a:lnTo>
+                  <a:lnTo>
+                    <a:pt x="6231159" y="1012046"/>
+                  </a:lnTo>
+                  <a:lnTo>
+                    <a:pt x="6302782" y="1018280"/>
+                  </a:lnTo>
+                  <a:lnTo>
+                    <a:pt x="6374404" y="1024434"/>
+                  </a:lnTo>
+                  <a:lnTo>
+                    <a:pt x="6446027" y="1030509"/>
+                  </a:lnTo>
+                  <a:lnTo>
+                    <a:pt x="6517649" y="1036505"/>
+                  </a:lnTo>
+                  <a:lnTo>
+                    <a:pt x="6589272" y="1042423"/>
+                  </a:lnTo>
+                  <a:lnTo>
+                    <a:pt x="6660894" y="1048266"/>
+                  </a:lnTo>
+                  <a:lnTo>
+                    <a:pt x="6732517" y="1054033"/>
+                  </a:lnTo>
+                  <a:lnTo>
+                    <a:pt x="6804139" y="1059725"/>
+                  </a:lnTo>
+                  <a:lnTo>
+                    <a:pt x="6875762" y="1065345"/>
+                  </a:lnTo>
+                  <a:lnTo>
+                    <a:pt x="6947385" y="1070891"/>
+                  </a:lnTo>
+                  <a:lnTo>
+                    <a:pt x="7019007" y="1076366"/>
+                  </a:lnTo>
+                  <a:lnTo>
+                    <a:pt x="7090630" y="1081771"/>
                   </a:lnTo>
                 </a:path>
               </a:pathLst>
@@ -5133,7 +5133,7 @@
           </p:nvSpPr>
           <p:spPr>
             <a:xfrm>
-              <a:off x="4401933" y="2073503"/>
+              <a:off x="4423736" y="2073503"/>
               <a:ext cx="0" cy="3649639"/>
             </a:xfrm>
             <a:custGeom>
@@ -5176,7 +5176,7 @@
           </p:nvSpPr>
           <p:spPr>
             <a:xfrm>
-              <a:off x="3507589" y="2073503"/>
+              <a:off x="3470882" y="2073503"/>
               <a:ext cx="0" cy="3649639"/>
             </a:xfrm>
             <a:custGeom>
@@ -5219,7 +5219,7 @@
           </p:nvSpPr>
           <p:spPr>
             <a:xfrm>
-              <a:off x="5433405" y="2073503"/>
+              <a:off x="5437283" y="2073503"/>
               <a:ext cx="0" cy="3649639"/>
             </a:xfrm>
             <a:custGeom>
@@ -5492,7 +5492,7 @@
           </p:nvSpPr>
           <p:spPr>
             <a:xfrm>
-              <a:off x="842324" y="5785772"/>
+              <a:off x="843419" y="5785772"/>
               <a:ext cx="161574" cy="80101"/>
             </a:xfrm>
             <a:prstGeom prst="rect">
@@ -5538,7 +5538,7 @@
           </p:nvSpPr>
           <p:spPr>
             <a:xfrm>
-              <a:off x="1681960" y="5785772"/>
+              <a:off x="1681469" y="5785772"/>
               <a:ext cx="161574" cy="80101"/>
             </a:xfrm>
             <a:prstGeom prst="rect">
@@ -5584,7 +5584,7 @@
           </p:nvSpPr>
           <p:spPr>
             <a:xfrm>
-              <a:off x="2521596" y="5785772"/>
+              <a:off x="2519520" y="5785772"/>
               <a:ext cx="161574" cy="80101"/>
             </a:xfrm>
             <a:prstGeom prst="rect">
@@ -5630,7 +5630,7 @@
           </p:nvSpPr>
           <p:spPr>
             <a:xfrm>
-              <a:off x="3361232" y="5785772"/>
+              <a:off x="3357571" y="5785772"/>
               <a:ext cx="161574" cy="80101"/>
             </a:xfrm>
             <a:prstGeom prst="rect">
@@ -5676,7 +5676,7 @@
           </p:nvSpPr>
           <p:spPr>
             <a:xfrm>
-              <a:off x="4200868" y="5785772"/>
+              <a:off x="4195621" y="5785772"/>
               <a:ext cx="161574" cy="80101"/>
             </a:xfrm>
             <a:prstGeom prst="rect">
@@ -5722,7 +5722,7 @@
           </p:nvSpPr>
           <p:spPr>
             <a:xfrm>
-              <a:off x="5090202" y="5785772"/>
+              <a:off x="5083370" y="5785772"/>
               <a:ext cx="62179" cy="80101"/>
             </a:xfrm>
             <a:prstGeom prst="rect">
@@ -5768,7 +5768,7 @@
           </p:nvSpPr>
           <p:spPr>
             <a:xfrm>
-              <a:off x="5898749" y="5785772"/>
+              <a:off x="5890331" y="5785772"/>
               <a:ext cx="124358" cy="80101"/>
             </a:xfrm>
             <a:prstGeom prst="rect">
@@ -5814,7 +5814,7 @@
           </p:nvSpPr>
           <p:spPr>
             <a:xfrm>
-              <a:off x="6738385" y="5785772"/>
+              <a:off x="6728381" y="5785772"/>
               <a:ext cx="124358" cy="80101"/>
             </a:xfrm>
             <a:prstGeom prst="rect">
@@ -5860,7 +5860,7 @@
           </p:nvSpPr>
           <p:spPr>
             <a:xfrm>
-              <a:off x="7578021" y="5785772"/>
+              <a:off x="7566432" y="5785772"/>
               <a:ext cx="124358" cy="80101"/>
             </a:xfrm>
             <a:prstGeom prst="rect">
@@ -5906,7 +5906,7 @@
           </p:nvSpPr>
           <p:spPr>
             <a:xfrm>
-              <a:off x="8417657" y="5785772"/>
+              <a:off x="8404483" y="5785772"/>
               <a:ext cx="124358" cy="80101"/>
             </a:xfrm>
             <a:prstGeom prst="rect">
@@ -6077,7 +6077,7 @@
                   <a:latin typeface="Helvetica"/>
                   <a:cs typeface="Helvetica"/>
                 </a:rPr>
-                <a:t>subHR per 10 % decline: 1.16 (0.99-1.37), p_Bonf = 0.429 (n = 6)  |  per IQR decline (Δ = 22.9 %): 1.42 (0.97-2.07)  |  IQR: [-19.2, 3.7] %</a:t>
+                <a:t>subHR per 10 % decline: 1.16 (0.99-1.38), p_Bonf = 0.448 (n = 6)  |  per IQR decline (Δ = 23.5 %): 1.43 (0.97-2.11)  |  IQR: [-19.6, 3.9] %</a:t>
               </a:r>
             </a:p>
           </p:txBody>
